--- a/CSI_Presence_Detection.pptx
+++ b/CSI_Presence_Detection.pptx
@@ -4,6 +4,9 @@
   <p:sldMasterIdLst>
     <p:sldMasterId id="2147483648" r:id="rId1"/>
   </p:sldMasterIdLst>
+  <p:notesMasterIdLst>
+    <p:notesMasterId r:id="rId12"/>
+  </p:notesMasterIdLst>
   <p:sldIdLst>
     <p:sldId id="256" r:id="rId2"/>
     <p:sldId id="257" r:id="rId3"/>
@@ -16,10 +19,7 @@
     <p:sldId id="264" r:id="rId10"/>
     <p:sldId id="265" r:id="rId11"/>
   </p:sldIdLst>
-  <p:notesMasterIdLst>
-    <p:notesMasterId r:id="rId12"/>
-  </p:notesMasterIdLst>
-  <p:sldSz cx="9144000" cy="5143500"/>
+  <p:sldSz cx="9144000" cy="5143500" type="screen16x9"/>
   <p:notesSz cx="5143500" cy="9144000"/>
   <p:defaultTextStyle>
     <a:lvl1pPr marL="0" algn="l" defTabSz="914400" rtl="0" eaLnBrk="1" latinLnBrk="0" hangingPunct="1">
@@ -113,7 +113,20 @@
       </a:defRPr>
     </a:lvl9pPr>
   </p:defaultTextStyle>
+  <p:extLst>
+    <p:ext uri="{EFAFB233-063F-42B5-8137-9DF3F51BA10A}">
+      <p15:sldGuideLst xmlns:p15="http://schemas.microsoft.com/office/powerpoint/2012/main"/>
+    </p:ext>
+  </p:extLst>
 </p:presentation>
+</file>
+
+<file path=ppt/revisionInfo.xml><?xml version="1.0" encoding="utf-8"?>
+<p1510:revInfo xmlns:a="http://schemas.openxmlformats.org/drawingml/2006/main" xmlns:r="http://schemas.openxmlformats.org/officeDocument/2006/relationships" xmlns:p1510="http://schemas.microsoft.com/office/powerpoint/2015/10/main">
+  <p1510:revLst>
+    <p1510:client id="{03C873EF-872A-F408-50C0-D5454F162ACF}" v="23" dt="2026-05-29T10:46:02.466"/>
+  </p1510:revLst>
+</p1510:revInfo>
 </file>
 
 <file path=ppt/notesMasters/notesMaster1.xml><?xml version="1.0" encoding="utf-8"?>
@@ -151,7 +164,7 @@
         <p:spPr>
           <a:xfrm>
             <a:off x="0" y="0"/>
-            <a:ext cx="2971800" cy="458788"/>
+            <a:ext cx="2228850" cy="458788"/>
           </a:xfrm>
           <a:prstGeom prst="rect">
             <a:avLst/>
@@ -181,8 +194,8 @@
         </p:nvSpPr>
         <p:spPr>
           <a:xfrm>
-            <a:off x="3884613" y="0"/>
-            <a:ext cx="2971800" cy="458788"/>
+            <a:off x="2913063" y="0"/>
+            <a:ext cx="2228850" cy="458788"/>
           </a:xfrm>
           <a:prstGeom prst="rect">
             <a:avLst/>
@@ -196,9 +209,8 @@
             </a:lvl1pPr>
           </a:lstStyle>
           <a:p>
-            <a:fld id="{5282F153-3F37-0F45-9E97-73ACFA13230C}" type="datetimeFigureOut">
-              <a:rPr lang="en-US"/>
-              <a:t>7/23/19</a:t>
+            <a:fld id="{DBE450D1-42EC-4F12-8CE5-45D45FE27EC9}" type="datetimeFigureOut">
+              <a:t>5/29/2026</a:t>
             </a:fld>
             <a:endParaRPr lang="en-US"/>
           </a:p>
@@ -216,7 +228,7 @@
         </p:nvSpPr>
         <p:spPr>
           <a:xfrm>
-            <a:off x="685800" y="1143000"/>
+            <a:off x="-171450" y="1143000"/>
             <a:ext cx="5486400" cy="3086100"/>
           </a:xfrm>
           <a:prstGeom prst="rect">
@@ -249,8 +261,8 @@
         </p:nvSpPr>
         <p:spPr>
           <a:xfrm>
-            <a:off x="685800" y="4400550"/>
-            <a:ext cx="5486400" cy="3600450"/>
+            <a:off x="514350" y="4400550"/>
+            <a:ext cx="4114800" cy="3600450"/>
           </a:xfrm>
           <a:prstGeom prst="rect">
             <a:avLst/>
@@ -309,7 +321,7 @@
         <p:spPr>
           <a:xfrm>
             <a:off x="0" y="8685213"/>
-            <a:ext cx="2971800" cy="458787"/>
+            <a:ext cx="2228850" cy="458787"/>
           </a:xfrm>
           <a:prstGeom prst="rect">
             <a:avLst/>
@@ -339,8 +351,8 @@
         </p:nvSpPr>
         <p:spPr>
           <a:xfrm>
-            <a:off x="3884613" y="8685213"/>
-            <a:ext cx="2971800" cy="458787"/>
+            <a:off x="2913063" y="8685213"/>
+            <a:ext cx="2228850" cy="458787"/>
           </a:xfrm>
           <a:prstGeom prst="rect">
             <a:avLst/>
@@ -354,8 +366,7 @@
             </a:lvl1pPr>
           </a:lstStyle>
           <a:p>
-            <a:fld id="{CE5E9CC1-C706-0F49-92D6-E571CC5EEA8F}" type="slidenum">
-              <a:rPr lang="en-US"/>
+            <a:fld id="{ECF94C07-F48C-47FA-B0DC-2A8E261DEDB3}" type="slidenum">
               <a:t>‹#›</a:t>
             </a:fld>
             <a:endParaRPr lang="en-US"/>
@@ -365,7 +376,7 @@
     </p:spTree>
     <p:extLst>
       <p:ext uri="{BB962C8B-B14F-4D97-AF65-F5344CB8AC3E}">
-        <p14:creationId xmlns:p14="http://schemas.microsoft.com/office/powerpoint/2010/main" val="1024086991"/>
+        <p14:creationId xmlns:p14="http://schemas.microsoft.com/office/powerpoint/2010/main" val="3170823228"/>
       </p:ext>
     </p:extLst>
   </p:cSld>
@@ -509,10 +520,6 @@
           <a:bodyPr/>
           <a:lstStyle/>
           <a:p>
-            <a:r>
-              <a:rPr lang="en-US" dirty="0"/>
-              <a:t/>
-            </a:r>
             <a:endParaRPr lang="en-US" dirty="0"/>
           </a:p>
         </p:txBody>
@@ -597,10 +604,6 @@
           <a:bodyPr/>
           <a:lstStyle/>
           <a:p>
-            <a:r>
-              <a:rPr lang="en-US" dirty="0"/>
-              <a:t/>
-            </a:r>
             <a:endParaRPr lang="en-US" dirty="0"/>
           </a:p>
         </p:txBody>
@@ -685,10 +688,6 @@
           <a:bodyPr/>
           <a:lstStyle/>
           <a:p>
-            <a:r>
-              <a:rPr lang="en-US" dirty="0"/>
-              <a:t/>
-            </a:r>
             <a:endParaRPr lang="en-US" dirty="0"/>
           </a:p>
         </p:txBody>
@@ -773,10 +772,6 @@
           <a:bodyPr/>
           <a:lstStyle/>
           <a:p>
-            <a:r>
-              <a:rPr lang="en-US" dirty="0"/>
-              <a:t/>
-            </a:r>
             <a:endParaRPr lang="en-US" dirty="0"/>
           </a:p>
         </p:txBody>
@@ -861,10 +856,6 @@
           <a:bodyPr/>
           <a:lstStyle/>
           <a:p>
-            <a:r>
-              <a:rPr lang="en-US" dirty="0"/>
-              <a:t/>
-            </a:r>
             <a:endParaRPr lang="en-US" dirty="0"/>
           </a:p>
         </p:txBody>
@@ -949,10 +940,6 @@
           <a:bodyPr/>
           <a:lstStyle/>
           <a:p>
-            <a:r>
-              <a:rPr lang="en-US" dirty="0"/>
-              <a:t/>
-            </a:r>
             <a:endParaRPr lang="en-US" dirty="0"/>
           </a:p>
         </p:txBody>
@@ -1037,10 +1024,6 @@
           <a:bodyPr/>
           <a:lstStyle/>
           <a:p>
-            <a:r>
-              <a:rPr lang="en-US" dirty="0"/>
-              <a:t/>
-            </a:r>
             <a:endParaRPr lang="en-US" dirty="0"/>
           </a:p>
         </p:txBody>
@@ -1125,10 +1108,6 @@
           <a:bodyPr/>
           <a:lstStyle/>
           <a:p>
-            <a:r>
-              <a:rPr lang="en-US" dirty="0"/>
-              <a:t/>
-            </a:r>
             <a:endParaRPr lang="en-US" dirty="0"/>
           </a:p>
         </p:txBody>
@@ -1213,10 +1192,6 @@
           <a:bodyPr/>
           <a:lstStyle/>
           <a:p>
-            <a:r>
-              <a:rPr lang="en-US" dirty="0"/>
-              <a:t/>
-            </a:r>
             <a:endParaRPr lang="en-US" dirty="0"/>
           </a:p>
         </p:txBody>
@@ -1301,10 +1276,6 @@
           <a:bodyPr/>
           <a:lstStyle/>
           <a:p>
-            <a:r>
-              <a:rPr lang="en-US" dirty="0"/>
-              <a:t/>
-            </a:r>
             <a:endParaRPr lang="en-US" dirty="0"/>
           </a:p>
         </p:txBody>
@@ -1378,6 +1349,11 @@
 <file path=ppt/slideMasters/slideMaster1.xml><?xml version="1.0" encoding="utf-8"?>
 <p:sldMaster xmlns:a="http://schemas.openxmlformats.org/drawingml/2006/main" xmlns:r="http://schemas.openxmlformats.org/officeDocument/2006/relationships" xmlns:p="http://schemas.openxmlformats.org/presentationml/2006/main">
   <p:cSld>
+    <p:bg>
+      <p:bgRef idx="1001">
+        <a:schemeClr val="bg1"/>
+      </p:bgRef>
+    </p:bg>
     <p:spTree>
       <p:nvGrpSpPr>
         <p:cNvPr id="1" name=""/>
@@ -1660,6 +1636,7 @@
         <a:solidFill>
           <a:srgbClr val="0D1B2A"/>
         </a:solidFill>
+        <a:effectLst/>
       </p:bgPr>
     </p:bg>
     <p:spTree>
@@ -1872,7 +1849,7 @@
           <a:bodyPr wrap="square" lIns="0" tIns="0" rIns="0" bIns="0" rtlCol="0" anchor="ctr"/>
           <a:lstStyle/>
           <a:p>
-            <a:pPr indent="0" marL="0">
+            <a:pPr marL="0" indent="0">
               <a:buNone/>
             </a:pPr>
             <a:r>
@@ -1911,7 +1888,7 @@
           <a:bodyPr wrap="square" lIns="0" tIns="0" rIns="0" bIns="0" rtlCol="0" anchor="ctr"/>
           <a:lstStyle/>
           <a:p>
-            <a:pPr indent="0" marL="0">
+            <a:pPr marL="0" indent="0">
               <a:buNone/>
             </a:pPr>
             <a:r>
@@ -1950,7 +1927,7 @@
           <a:bodyPr wrap="square" lIns="0" tIns="0" rIns="0" bIns="0" rtlCol="0" anchor="ctr"/>
           <a:lstStyle/>
           <a:p>
-            <a:pPr indent="0" marL="0">
+            <a:pPr marL="0" indent="0">
               <a:buNone/>
             </a:pPr>
             <a:r>
@@ -1989,7 +1966,7 @@
           <a:bodyPr wrap="square" lIns="0" tIns="0" rIns="0" bIns="0" rtlCol="0" anchor="ctr"/>
           <a:lstStyle/>
           <a:p>
-            <a:pPr indent="0" marL="0">
+            <a:pPr marL="0" indent="0">
               <a:buNone/>
             </a:pPr>
             <a:r>
@@ -2028,7 +2005,7 @@
           <a:bodyPr wrap="square" lIns="0" tIns="0" rIns="0" bIns="0" rtlCol="0" anchor="ctr"/>
           <a:lstStyle/>
           <a:p>
-            <a:pPr indent="0" marL="0">
+            <a:pPr marL="0" indent="0">
               <a:buNone/>
             </a:pPr>
             <a:r>
@@ -2198,11 +2175,11 @@
           <a:bodyPr wrap="square" lIns="0" tIns="0" rIns="0" bIns="0" rtlCol="0" anchor="ctr"/>
           <a:lstStyle/>
           <a:p>
-            <a:pPr indent="0" marL="0">
-              <a:buNone/>
-            </a:pPr>
-            <a:r>
-              <a:rPr lang="en-US" sz="1100" spc="300" kern="0" dirty="0">
+            <a:pPr marL="0" indent="0">
+              <a:buNone/>
+            </a:pPr>
+            <a:r>
+              <a:rPr lang="en-US" sz="1100" kern="0" spc="300" dirty="0">
                 <a:solidFill>
                   <a:srgbClr val="0A8F8F"/>
                 </a:solidFill>
@@ -2232,6 +2209,7 @@
         <a:solidFill>
           <a:srgbClr val="0D1B2A"/>
         </a:solidFill>
+        <a:effectLst/>
       </p:bgPr>
     </p:bg>
     <p:spTree>
@@ -2427,7 +2405,7 @@
           <a:bodyPr wrap="square" lIns="0" tIns="0" rIns="0" bIns="0" rtlCol="0" anchor="ctr"/>
           <a:lstStyle/>
           <a:p>
-            <a:pPr indent="0" marL="0">
+            <a:pPr marL="0" indent="0">
               <a:buNone/>
             </a:pPr>
             <a:r>
@@ -2466,7 +2444,7 @@
           <a:bodyPr wrap="square" lIns="0" tIns="0" rIns="0" bIns="0" rtlCol="0" anchor="ctr"/>
           <a:lstStyle/>
           <a:p>
-            <a:pPr indent="0" marL="0">
+            <a:pPr marL="0" indent="0">
               <a:buNone/>
             </a:pPr>
             <a:r>
@@ -2530,7 +2508,7 @@
           <a:bodyPr wrap="square" lIns="0" tIns="0" rIns="0" bIns="0" rtlCol="0" anchor="ctr"/>
           <a:lstStyle/>
           <a:p>
-            <a:pPr algn="ctr" indent="0" marL="0">
+            <a:pPr marL="0" indent="0" algn="ctr">
               <a:buNone/>
             </a:pPr>
             <a:r>
@@ -2594,7 +2572,7 @@
           <a:bodyPr wrap="square" lIns="0" tIns="0" rIns="0" bIns="0" rtlCol="0" anchor="ctr"/>
           <a:lstStyle/>
           <a:p>
-            <a:pPr algn="ctr" indent="0" marL="0">
+            <a:pPr marL="0" indent="0" algn="ctr">
               <a:buNone/>
             </a:pPr>
             <a:r>
@@ -2633,7 +2611,7 @@
           <a:bodyPr wrap="square" lIns="0" tIns="0" rIns="0" bIns="0" rtlCol="0" anchor="ctr"/>
           <a:lstStyle/>
           <a:p>
-            <a:pPr indent="0" marL="0">
+            <a:pPr marL="0" indent="0">
               <a:buNone/>
             </a:pPr>
             <a:r>
@@ -2672,7 +2650,7 @@
           <a:bodyPr wrap="square" lIns="0" tIns="0" rIns="0" bIns="0" rtlCol="0" anchor="ctr"/>
           <a:lstStyle/>
           <a:p>
-            <a:pPr indent="0" marL="0">
+            <a:pPr marL="0" indent="0">
               <a:buNone/>
             </a:pPr>
             <a:r>
@@ -2706,6 +2684,7 @@
         <a:solidFill>
           <a:srgbClr val="F7FAFB"/>
         </a:solidFill>
+        <a:effectLst/>
       </p:bgPr>
     </p:bg>
     <p:spTree>
@@ -2768,7 +2747,7 @@
           <a:bodyPr wrap="square" lIns="0" tIns="0" rIns="0" bIns="0" rtlCol="0" anchor="ctr"/>
           <a:lstStyle/>
           <a:p>
-            <a:pPr algn="l" indent="0" marL="0">
+            <a:pPr marL="0" indent="0" algn="l">
               <a:buNone/>
             </a:pPr>
             <a:r>
@@ -2785,7 +2764,7 @@
             <a:endParaRPr lang="en-US" sz="3400" dirty="0"/>
           </a:p>
           <a:p>
-            <a:pPr algn="l" indent="0" marL="0">
+            <a:pPr marL="0" indent="0" algn="l">
               <a:buNone/>
             </a:pPr>
             <a:r>
@@ -2824,7 +2803,7 @@
           <a:bodyPr wrap="square" lIns="0" tIns="0" rIns="0" bIns="0" rtlCol="0" anchor="ctr"/>
           <a:lstStyle/>
           <a:p>
-            <a:pPr indent="0" marL="0">
+            <a:pPr marL="0" indent="0">
               <a:buNone/>
             </a:pPr>
             <a:r>
@@ -2841,7 +2820,7 @@
             <a:endParaRPr lang="en-US" sz="1400" dirty="0"/>
           </a:p>
           <a:p>
-            <a:pPr indent="0" marL="0">
+            <a:pPr marL="0" indent="0">
               <a:buNone/>
             </a:pPr>
             <a:r>
@@ -2930,7 +2909,7 @@
           <a:bodyPr wrap="square" rtlCol="0" anchor="ctr"/>
           <a:lstStyle/>
           <a:p>
-            <a:pPr indent="0" marL="0">
+            <a:pPr marL="0" indent="0">
               <a:buNone/>
             </a:pPr>
             <a:r>
@@ -2994,7 +2973,7 @@
           <a:bodyPr wrap="square" lIns="0" tIns="0" rIns="0" bIns="0" rtlCol="0" anchor="ctr"/>
           <a:lstStyle/>
           <a:p>
-            <a:pPr algn="ctr" indent="0" marL="0">
+            <a:pPr marL="0" indent="0" algn="ctr">
               <a:buNone/>
             </a:pPr>
             <a:r>
@@ -3033,7 +3012,7 @@
           <a:bodyPr wrap="square" lIns="0" tIns="0" rIns="0" bIns="0" rtlCol="0" anchor="ctr"/>
           <a:lstStyle/>
           <a:p>
-            <a:pPr indent="0" marL="0">
+            <a:pPr marL="0" indent="0">
               <a:buNone/>
             </a:pPr>
             <a:r>
@@ -3072,7 +3051,7 @@
           <a:bodyPr wrap="square" lIns="0" tIns="0" rIns="0" bIns="0" rtlCol="0" anchor="ctr"/>
           <a:lstStyle/>
           <a:p>
-            <a:pPr indent="0" marL="0">
+            <a:pPr marL="0" indent="0">
               <a:buNone/>
             </a:pPr>
             <a:r>
@@ -3136,7 +3115,7 @@
           <a:bodyPr wrap="square" lIns="0" tIns="0" rIns="0" bIns="0" rtlCol="0" anchor="ctr"/>
           <a:lstStyle/>
           <a:p>
-            <a:pPr algn="ctr" indent="0" marL="0">
+            <a:pPr marL="0" indent="0" algn="ctr">
               <a:buNone/>
             </a:pPr>
             <a:r>
@@ -3175,7 +3154,7 @@
           <a:bodyPr wrap="square" lIns="0" tIns="0" rIns="0" bIns="0" rtlCol="0" anchor="ctr"/>
           <a:lstStyle/>
           <a:p>
-            <a:pPr indent="0" marL="0">
+            <a:pPr marL="0" indent="0">
               <a:buNone/>
             </a:pPr>
             <a:r>
@@ -3214,7 +3193,7 @@
           <a:bodyPr wrap="square" lIns="0" tIns="0" rIns="0" bIns="0" rtlCol="0" anchor="ctr"/>
           <a:lstStyle/>
           <a:p>
-            <a:pPr indent="0" marL="0">
+            <a:pPr marL="0" indent="0">
               <a:buNone/>
             </a:pPr>
             <a:r>
@@ -3278,7 +3257,7 @@
           <a:bodyPr wrap="square" lIns="0" tIns="0" rIns="0" bIns="0" rtlCol="0" anchor="ctr"/>
           <a:lstStyle/>
           <a:p>
-            <a:pPr algn="ctr" indent="0" marL="0">
+            <a:pPr marL="0" indent="0" algn="ctr">
               <a:buNone/>
             </a:pPr>
             <a:r>
@@ -3317,7 +3296,7 @@
           <a:bodyPr wrap="square" lIns="0" tIns="0" rIns="0" bIns="0" rtlCol="0" anchor="ctr"/>
           <a:lstStyle/>
           <a:p>
-            <a:pPr indent="0" marL="0">
+            <a:pPr marL="0" indent="0">
               <a:buNone/>
             </a:pPr>
             <a:r>
@@ -3356,7 +3335,7 @@
           <a:bodyPr wrap="square" lIns="0" tIns="0" rIns="0" bIns="0" rtlCol="0" anchor="ctr"/>
           <a:lstStyle/>
           <a:p>
-            <a:pPr indent="0" marL="0">
+            <a:pPr marL="0" indent="0">
               <a:buNone/>
             </a:pPr>
             <a:r>
@@ -3390,6 +3369,7 @@
         <a:solidFill>
           <a:srgbClr val="0D1B2A"/>
         </a:solidFill>
+        <a:effectLst/>
       </p:bgPr>
     </p:bg>
     <p:spTree>
@@ -3427,7 +3407,7 @@
           <a:bodyPr wrap="square" lIns="0" tIns="0" rIns="0" bIns="0" rtlCol="0" anchor="ctr"/>
           <a:lstStyle/>
           <a:p>
-            <a:pPr indent="0" marL="0">
+            <a:pPr marL="0" indent="0">
               <a:buNone/>
             </a:pPr>
             <a:r>
@@ -3491,7 +3471,7 @@
           <a:bodyPr wrap="square" lIns="0" tIns="0" rIns="0" bIns="0" rtlCol="0" anchor="ctr"/>
           <a:lstStyle/>
           <a:p>
-            <a:pPr indent="0" marL="0">
+            <a:pPr marL="0" indent="0">
               <a:buNone/>
             </a:pPr>
             <a:r>
@@ -3536,14 +3516,14 @@
       </p:sp>
       <p:pic>
         <p:nvPicPr>
-          <p:cNvPr id="6" name="Image 0" descr="preencoded.png">    </p:cNvPr>
+          <p:cNvPr id="6" name="Image 0" descr="preencoded.png"/>
           <p:cNvPicPr>
             <a:picLocks noChangeAspect="1"/>
           </p:cNvPicPr>
           <p:nvPr/>
         </p:nvPicPr>
         <p:blipFill>
-          <a:blip r:embed="rId1"/>
+          <a:blip r:embed="rId3"/>
           <a:stretch>
             <a:fillRect/>
           </a:stretch>
@@ -3579,7 +3559,7 @@
           <a:bodyPr wrap="square" lIns="0" tIns="0" rIns="0" bIns="0" rtlCol="0" anchor="ctr"/>
           <a:lstStyle/>
           <a:p>
-            <a:pPr indent="0" marL="0">
+            <a:pPr marL="0" indent="0">
               <a:buNone/>
             </a:pPr>
             <a:r>
@@ -3618,7 +3598,7 @@
           <a:bodyPr wrap="square" lIns="0" tIns="0" rIns="0" bIns="0" rtlCol="0" anchor="ctr"/>
           <a:lstStyle/>
           <a:p>
-            <a:pPr indent="0" marL="0">
+            <a:pPr marL="0" indent="0">
               <a:buNone/>
             </a:pPr>
             <a:r>
@@ -3657,7 +3637,7 @@
           <a:bodyPr wrap="square" lIns="0" tIns="0" rIns="0" bIns="0" rtlCol="0" anchor="ctr"/>
           <a:lstStyle/>
           <a:p>
-            <a:pPr indent="0" marL="0">
+            <a:pPr marL="0" indent="0">
               <a:buNone/>
             </a:pPr>
             <a:r>
@@ -3696,7 +3676,7 @@
           <a:bodyPr wrap="square" lIns="0" tIns="0" rIns="0" bIns="0" rtlCol="0" anchor="ctr"/>
           <a:lstStyle/>
           <a:p>
-            <a:pPr indent="0" marL="0">
+            <a:pPr marL="0" indent="0">
               <a:buNone/>
             </a:pPr>
             <a:r>
@@ -3735,7 +3715,7 @@
           <a:bodyPr wrap="square" lIns="0" tIns="0" rIns="0" bIns="0" rtlCol="0" anchor="ctr"/>
           <a:lstStyle/>
           <a:p>
-            <a:pPr indent="0" marL="0">
+            <a:pPr marL="0" indent="0">
               <a:buNone/>
             </a:pPr>
             <a:r>
@@ -3774,7 +3754,7 @@
           <a:bodyPr wrap="square" lIns="0" tIns="0" rIns="0" bIns="0" rtlCol="0" anchor="ctr"/>
           <a:lstStyle/>
           <a:p>
-            <a:pPr indent="0" marL="0">
+            <a:pPr marL="0" indent="0">
               <a:buNone/>
             </a:pPr>
             <a:r>
@@ -3838,7 +3818,7 @@
           <a:bodyPr wrap="square" lIns="0" tIns="0" rIns="0" bIns="0" rtlCol="0" anchor="ctr"/>
           <a:lstStyle/>
           <a:p>
-            <a:pPr algn="ctr" indent="0" marL="0">
+            <a:pPr marL="0" indent="0" algn="ctr">
               <a:buNone/>
             </a:pPr>
             <a:r>
@@ -3877,7 +3857,7 @@
           <a:bodyPr wrap="square" lIns="0" tIns="0" rIns="0" bIns="0" rtlCol="0" anchor="ctr"/>
           <a:lstStyle/>
           <a:p>
-            <a:pPr indent="0" marL="0">
+            <a:pPr marL="0" indent="0">
               <a:buNone/>
             </a:pPr>
             <a:r>
@@ -3894,7 +3874,7 @@
             <a:endParaRPr lang="en-US" sz="900" dirty="0"/>
           </a:p>
           <a:p>
-            <a:pPr indent="0" marL="0">
+            <a:pPr marL="0" indent="0">
               <a:buNone/>
             </a:pPr>
             <a:r>
@@ -3939,14 +3919,14 @@
       </p:sp>
       <p:pic>
         <p:nvPicPr>
-          <p:cNvPr id="17" name="Image 1" descr="preencoded.png">    </p:cNvPr>
+          <p:cNvPr id="17" name="Image 1" descr="preencoded.png"/>
           <p:cNvPicPr>
             <a:picLocks noChangeAspect="1"/>
           </p:cNvPicPr>
           <p:nvPr/>
         </p:nvPicPr>
         <p:blipFill>
-          <a:blip r:embed="rId2"/>
+          <a:blip r:embed="rId4"/>
           <a:stretch>
             <a:fillRect/>
           </a:stretch>
@@ -3982,7 +3962,7 @@
           <a:bodyPr wrap="square" lIns="0" tIns="0" rIns="0" bIns="0" rtlCol="0" anchor="ctr"/>
           <a:lstStyle/>
           <a:p>
-            <a:pPr indent="0" marL="0">
+            <a:pPr marL="0" indent="0">
               <a:buNone/>
             </a:pPr>
             <a:r>
@@ -4021,7 +4001,7 @@
           <a:bodyPr wrap="square" lIns="0" tIns="0" rIns="0" bIns="0" rtlCol="0" anchor="ctr"/>
           <a:lstStyle/>
           <a:p>
-            <a:pPr indent="0" marL="0">
+            <a:pPr marL="0" indent="0">
               <a:buNone/>
             </a:pPr>
             <a:r>
@@ -4060,7 +4040,7 @@
           <a:bodyPr wrap="square" lIns="0" tIns="0" rIns="0" bIns="0" rtlCol="0" anchor="ctr"/>
           <a:lstStyle/>
           <a:p>
-            <a:pPr indent="0" marL="0">
+            <a:pPr marL="0" indent="0">
               <a:buNone/>
             </a:pPr>
             <a:r>
@@ -4099,7 +4079,7 @@
           <a:bodyPr wrap="square" lIns="0" tIns="0" rIns="0" bIns="0" rtlCol="0" anchor="ctr"/>
           <a:lstStyle/>
           <a:p>
-            <a:pPr indent="0" marL="0">
+            <a:pPr marL="0" indent="0">
               <a:buNone/>
             </a:pPr>
             <a:r>
@@ -4138,7 +4118,7 @@
           <a:bodyPr wrap="square" lIns="0" tIns="0" rIns="0" bIns="0" rtlCol="0" anchor="ctr"/>
           <a:lstStyle/>
           <a:p>
-            <a:pPr indent="0" marL="0">
+            <a:pPr marL="0" indent="0">
               <a:buNone/>
             </a:pPr>
             <a:r>
@@ -4177,7 +4157,7 @@
           <a:bodyPr wrap="square" lIns="0" tIns="0" rIns="0" bIns="0" rtlCol="0" anchor="ctr"/>
           <a:lstStyle/>
           <a:p>
-            <a:pPr indent="0" marL="0">
+            <a:pPr marL="0" indent="0">
               <a:buNone/>
             </a:pPr>
             <a:r>
@@ -4241,7 +4221,7 @@
           <a:bodyPr wrap="square" lIns="0" tIns="0" rIns="0" bIns="0" rtlCol="0" anchor="ctr"/>
           <a:lstStyle/>
           <a:p>
-            <a:pPr algn="ctr" indent="0" marL="0">
+            <a:pPr marL="0" indent="0" algn="ctr">
               <a:buNone/>
             </a:pPr>
             <a:r>
@@ -4280,7 +4260,7 @@
           <a:bodyPr wrap="square" lIns="0" tIns="0" rIns="0" bIns="0" rtlCol="0" anchor="ctr"/>
           <a:lstStyle/>
           <a:p>
-            <a:pPr indent="0" marL="0">
+            <a:pPr marL="0" indent="0">
               <a:buNone/>
             </a:pPr>
             <a:r>
@@ -4297,7 +4277,7 @@
             <a:endParaRPr lang="en-US" sz="900" dirty="0"/>
           </a:p>
           <a:p>
-            <a:pPr indent="0" marL="0">
+            <a:pPr marL="0" indent="0">
               <a:buNone/>
             </a:pPr>
             <a:r>
@@ -4361,7 +4341,7 @@
           <a:bodyPr wrap="square" lIns="0" tIns="0" rIns="0" bIns="0" rtlCol="0" anchor="ctr"/>
           <a:lstStyle/>
           <a:p>
-            <a:pPr algn="ctr" indent="0" marL="0">
+            <a:pPr marL="0" indent="0" algn="ctr">
               <a:buNone/>
             </a:pPr>
             <a:r>
@@ -4379,6 +4359,68 @@
           </a:p>
         </p:txBody>
       </p:sp>
+      <p:pic>
+        <p:nvPicPr>
+          <p:cNvPr id="29" name="Picture 28" descr="Seeed XIAO ESP32C3">
+            <a:extLst>
+              <a:ext uri="{FF2B5EF4-FFF2-40B4-BE49-F238E27FC236}">
+                <a16:creationId xmlns:a16="http://schemas.microsoft.com/office/drawing/2014/main" id="{79A243DE-6AC3-77ED-82A1-A80A95B142A9}"/>
+              </a:ext>
+            </a:extLst>
+          </p:cNvPr>
+          <p:cNvPicPr>
+            <a:picLocks noChangeAspect="1"/>
+          </p:cNvPicPr>
+          <p:nvPr/>
+        </p:nvPicPr>
+        <p:blipFill>
+          <a:blip r:embed="rId5"/>
+          <a:srcRect l="31406" t="15035" r="31476" b="16960"/>
+          <a:stretch>
+            <a:fillRect/>
+          </a:stretch>
+        </p:blipFill>
+        <p:spPr>
+          <a:xfrm>
+            <a:off x="5174409" y="1607605"/>
+            <a:ext cx="1365397" cy="1883025"/>
+          </a:xfrm>
+          <a:prstGeom prst="rect">
+            <a:avLst/>
+          </a:prstGeom>
+        </p:spPr>
+      </p:pic>
+      <p:pic>
+        <p:nvPicPr>
+          <p:cNvPr id="31" name="Picture 30" descr="Seeed Xiao ESP32-C6 - WiFi/Bluetooth - Seeedstudio 113991254 Botland -  Robotic Shop">
+            <a:extLst>
+              <a:ext uri="{FF2B5EF4-FFF2-40B4-BE49-F238E27FC236}">
+                <a16:creationId xmlns:a16="http://schemas.microsoft.com/office/drawing/2014/main" id="{5F81F784-E79F-4EFB-C0CC-9139B97AEBD5}"/>
+              </a:ext>
+            </a:extLst>
+          </p:cNvPr>
+          <p:cNvPicPr>
+            <a:picLocks noChangeAspect="1"/>
+          </p:cNvPicPr>
+          <p:nvPr/>
+        </p:nvPicPr>
+        <p:blipFill>
+          <a:blip r:embed="rId6"/>
+          <a:srcRect l="14700" t="4894" r="16106" b="6302"/>
+          <a:stretch>
+            <a:fillRect/>
+          </a:stretch>
+        </p:blipFill>
+        <p:spPr>
+          <a:xfrm>
+            <a:off x="774164" y="1502919"/>
+            <a:ext cx="1512042" cy="2036488"/>
+          </a:xfrm>
+          <a:prstGeom prst="rect">
+            <a:avLst/>
+          </a:prstGeom>
+        </p:spPr>
+      </p:pic>
     </p:spTree>
   </p:cSld>
   <p:clrMapOvr>
@@ -4395,6 +4437,7 @@
         <a:solidFill>
           <a:srgbClr val="0D1B2A"/>
         </a:solidFill>
+        <a:effectLst/>
       </p:bgPr>
     </p:bg>
     <p:spTree>
@@ -4432,7 +4475,7 @@
           <a:bodyPr wrap="square" lIns="0" tIns="0" rIns="0" bIns="0" rtlCol="0" anchor="ctr"/>
           <a:lstStyle/>
           <a:p>
-            <a:pPr indent="0" marL="0">
+            <a:pPr marL="0" indent="0">
               <a:buNone/>
             </a:pPr>
             <a:r>
@@ -4523,7 +4566,7 @@
           <a:bodyPr wrap="square" lIns="0" tIns="0" rIns="0" bIns="0" rtlCol="0" anchor="ctr"/>
           <a:lstStyle/>
           <a:p>
-            <a:pPr algn="ctr" indent="0" marL="0">
+            <a:pPr marL="0" indent="0" algn="ctr">
               <a:buNone/>
             </a:pPr>
             <a:r>
@@ -4540,7 +4583,7 @@
             <a:endParaRPr lang="en-US" sz="1300" dirty="0"/>
           </a:p>
           <a:p>
-            <a:pPr algn="ctr" indent="0" marL="0">
+            <a:pPr marL="0" indent="0" algn="ctr">
               <a:buNone/>
             </a:pPr>
             <a:r>
@@ -4579,7 +4622,7 @@
           <a:bodyPr wrap="square" lIns="0" tIns="0" rIns="0" bIns="0" rtlCol="0" anchor="ctr"/>
           <a:lstStyle/>
           <a:p>
-            <a:pPr algn="ctr" indent="0" marL="0">
+            <a:pPr marL="0" indent="0" algn="ctr">
               <a:buNone/>
             </a:pPr>
             <a:r>
@@ -4596,7 +4639,7 @@
             <a:endParaRPr lang="en-US" sz="1000" dirty="0"/>
           </a:p>
           <a:p>
-            <a:pPr algn="ctr" indent="0" marL="0">
+            <a:pPr marL="0" indent="0" algn="ctr">
               <a:buNone/>
             </a:pPr>
             <a:r>
@@ -4685,7 +4728,7 @@
           <a:bodyPr wrap="square" lIns="0" tIns="0" rIns="0" bIns="0" rtlCol="0" anchor="ctr"/>
           <a:lstStyle/>
           <a:p>
-            <a:pPr algn="ctr" indent="0" marL="0">
+            <a:pPr marL="0" indent="0" algn="ctr">
               <a:buNone/>
             </a:pPr>
             <a:r>
@@ -4724,7 +4767,7 @@
           <a:bodyPr wrap="square" lIns="0" tIns="0" rIns="0" bIns="0" rtlCol="0" anchor="ctr"/>
           <a:lstStyle/>
           <a:p>
-            <a:pPr algn="ctr" indent="0" marL="0">
+            <a:pPr marL="0" indent="0" algn="ctr">
               <a:buNone/>
             </a:pPr>
             <a:r>
@@ -4741,7 +4784,7 @@
             <a:endParaRPr lang="en-US" sz="1000" dirty="0"/>
           </a:p>
           <a:p>
-            <a:pPr algn="ctr" indent="0" marL="0">
+            <a:pPr marL="0" indent="0" algn="ctr">
               <a:buNone/>
             </a:pPr>
             <a:r>
@@ -4830,7 +4873,7 @@
           <a:bodyPr wrap="square" lIns="0" tIns="0" rIns="0" bIns="0" rtlCol="0" anchor="ctr"/>
           <a:lstStyle/>
           <a:p>
-            <a:pPr algn="ctr" indent="0" marL="0">
+            <a:pPr marL="0" indent="0" algn="ctr">
               <a:buNone/>
             </a:pPr>
             <a:r>
@@ -4869,7 +4912,7 @@
           <a:bodyPr wrap="square" lIns="0" tIns="0" rIns="0" bIns="0" rtlCol="0" anchor="ctr"/>
           <a:lstStyle/>
           <a:p>
-            <a:pPr algn="ctr" indent="0" marL="0">
+            <a:pPr marL="0" indent="0" algn="ctr">
               <a:buNone/>
             </a:pPr>
             <a:r>
@@ -4886,7 +4929,7 @@
             <a:endParaRPr lang="en-US" sz="1000" dirty="0"/>
           </a:p>
           <a:p>
-            <a:pPr algn="ctr" indent="0" marL="0">
+            <a:pPr marL="0" indent="0" algn="ctr">
               <a:buNone/>
             </a:pPr>
             <a:r>
@@ -4975,7 +5018,7 @@
           <a:bodyPr wrap="square" lIns="0" tIns="0" rIns="0" bIns="0" rtlCol="0" anchor="ctr"/>
           <a:lstStyle/>
           <a:p>
-            <a:pPr algn="ctr" indent="0" marL="0">
+            <a:pPr marL="0" indent="0" algn="ctr">
               <a:buNone/>
             </a:pPr>
             <a:r>
@@ -4992,7 +5035,7 @@
             <a:endParaRPr lang="en-US" sz="1300" dirty="0"/>
           </a:p>
           <a:p>
-            <a:pPr algn="ctr" indent="0" marL="0">
+            <a:pPr marL="0" indent="0" algn="ctr">
               <a:buNone/>
             </a:pPr>
             <a:r>
@@ -5031,7 +5074,7 @@
           <a:bodyPr wrap="square" lIns="0" tIns="0" rIns="0" bIns="0" rtlCol="0" anchor="ctr"/>
           <a:lstStyle/>
           <a:p>
-            <a:pPr algn="ctr" indent="0" marL="0">
+            <a:pPr marL="0" indent="0" algn="ctr">
               <a:buNone/>
             </a:pPr>
             <a:r>
@@ -5048,7 +5091,7 @@
             <a:endParaRPr lang="en-US" sz="1000" dirty="0"/>
           </a:p>
           <a:p>
-            <a:pPr algn="ctr" indent="0" marL="0">
+            <a:pPr marL="0" indent="0" algn="ctr">
               <a:buNone/>
             </a:pPr>
             <a:r>
@@ -5137,7 +5180,7 @@
           <a:bodyPr wrap="square" lIns="0" tIns="0" rIns="0" bIns="0" rtlCol="0" anchor="ctr"/>
           <a:lstStyle/>
           <a:p>
-            <a:pPr algn="ctr" indent="0" marL="0">
+            <a:pPr marL="0" indent="0" algn="ctr">
               <a:buNone/>
             </a:pPr>
             <a:r>
@@ -5154,7 +5197,7 @@
             <a:endParaRPr lang="en-US" sz="1300" dirty="0"/>
           </a:p>
           <a:p>
-            <a:pPr algn="ctr" indent="0" marL="0">
+            <a:pPr marL="0" indent="0" algn="ctr">
               <a:buNone/>
             </a:pPr>
             <a:r>
@@ -5193,7 +5236,7 @@
           <a:bodyPr wrap="square" lIns="0" tIns="0" rIns="0" bIns="0" rtlCol="0" anchor="ctr"/>
           <a:lstStyle/>
           <a:p>
-            <a:pPr algn="ctr" indent="0" marL="0">
+            <a:pPr marL="0" indent="0" algn="ctr">
               <a:buNone/>
             </a:pPr>
             <a:r>
@@ -5210,7 +5253,7 @@
             <a:endParaRPr lang="en-US" sz="1000" dirty="0"/>
           </a:p>
           <a:p>
-            <a:pPr algn="ctr" indent="0" marL="0">
+            <a:pPr marL="0" indent="0" algn="ctr">
               <a:buNone/>
             </a:pPr>
             <a:r>
@@ -5249,7 +5292,7 @@
           <a:bodyPr wrap="square" lIns="0" tIns="0" rIns="0" bIns="0" rtlCol="0" anchor="ctr"/>
           <a:lstStyle/>
           <a:p>
-            <a:pPr algn="ctr" indent="0" marL="0">
+            <a:pPr marL="0" indent="0" algn="ctr">
               <a:buNone/>
             </a:pPr>
             <a:r>
@@ -5288,7 +5331,7 @@
           <a:bodyPr wrap="square" lIns="0" tIns="0" rIns="0" bIns="0" rtlCol="0" anchor="ctr"/>
           <a:lstStyle/>
           <a:p>
-            <a:pPr algn="ctr" indent="0" marL="0">
+            <a:pPr marL="0" indent="0" algn="ctr">
               <a:buNone/>
             </a:pPr>
             <a:r>
@@ -5305,7 +5348,7 @@
             <a:endParaRPr lang="en-US" sz="900" dirty="0"/>
           </a:p>
           <a:p>
-            <a:pPr algn="ctr" indent="0" marL="0">
+            <a:pPr marL="0" indent="0" algn="ctr">
               <a:buNone/>
             </a:pPr>
             <a:r>
@@ -5344,7 +5387,7 @@
           <a:bodyPr wrap="square" lIns="0" tIns="0" rIns="0" bIns="0" rtlCol="0" anchor="ctr"/>
           <a:lstStyle/>
           <a:p>
-            <a:pPr algn="ctr" indent="0" marL="0">
+            <a:pPr marL="0" indent="0" algn="ctr">
               <a:buNone/>
             </a:pPr>
             <a:r>
@@ -5361,7 +5404,7 @@
             <a:endParaRPr lang="en-US" sz="900" dirty="0"/>
           </a:p>
           <a:p>
-            <a:pPr algn="ctr" indent="0" marL="0">
+            <a:pPr marL="0" indent="0" algn="ctr">
               <a:buNone/>
             </a:pPr>
             <a:r>
@@ -5400,7 +5443,7 @@
           <a:bodyPr wrap="square" lIns="0" tIns="0" rIns="0" bIns="0" rtlCol="0" anchor="ctr"/>
           <a:lstStyle/>
           <a:p>
-            <a:pPr algn="ctr" indent="0" marL="0">
+            <a:pPr marL="0" indent="0" algn="ctr">
               <a:buNone/>
             </a:pPr>
             <a:r>
@@ -5417,7 +5460,7 @@
             <a:endParaRPr lang="en-US" sz="900" dirty="0"/>
           </a:p>
           <a:p>
-            <a:pPr algn="ctr" indent="0" marL="0">
+            <a:pPr marL="0" indent="0" algn="ctr">
               <a:buNone/>
             </a:pPr>
             <a:r>
@@ -5481,7 +5524,7 @@
           <a:bodyPr wrap="square" lIns="0" tIns="0" rIns="0" bIns="0" rtlCol="0" anchor="ctr"/>
           <a:lstStyle/>
           <a:p>
-            <a:pPr indent="0" marL="0">
+            <a:pPr marL="0" indent="0">
               <a:buNone/>
             </a:pPr>
             <a:r>
@@ -5520,7 +5563,7 @@
           <a:bodyPr wrap="square" lIns="0" tIns="0" rIns="0" bIns="0" rtlCol="0" anchor="ctr"/>
           <a:lstStyle/>
           <a:p>
-            <a:pPr indent="0" marL="0">
+            <a:pPr marL="0" indent="0">
               <a:buNone/>
             </a:pPr>
             <a:r>
@@ -5584,7 +5627,7 @@
           <a:bodyPr wrap="square" lIns="0" tIns="0" rIns="0" bIns="0" rtlCol="0" anchor="ctr"/>
           <a:lstStyle/>
           <a:p>
-            <a:pPr indent="0" marL="0">
+            <a:pPr marL="0" indent="0">
               <a:buNone/>
             </a:pPr>
             <a:r>
@@ -5623,7 +5666,7 @@
           <a:bodyPr wrap="square" lIns="0" tIns="0" rIns="0" bIns="0" rtlCol="0" anchor="ctr"/>
           <a:lstStyle/>
           <a:p>
-            <a:pPr indent="0" marL="0">
+            <a:pPr marL="0" indent="0">
               <a:buNone/>
             </a:pPr>
             <a:r>
@@ -5687,7 +5730,7 @@
           <a:bodyPr wrap="square" lIns="0" tIns="0" rIns="0" bIns="0" rtlCol="0" anchor="ctr"/>
           <a:lstStyle/>
           <a:p>
-            <a:pPr indent="0" marL="0">
+            <a:pPr marL="0" indent="0">
               <a:buNone/>
             </a:pPr>
             <a:r>
@@ -5726,7 +5769,7 @@
           <a:bodyPr wrap="square" lIns="0" tIns="0" rIns="0" bIns="0" rtlCol="0" anchor="ctr"/>
           <a:lstStyle/>
           <a:p>
-            <a:pPr indent="0" marL="0">
+            <a:pPr marL="0" indent="0">
               <a:buNone/>
             </a:pPr>
             <a:r>
@@ -5760,6 +5803,7 @@
         <a:solidFill>
           <a:srgbClr val="F7FAFB"/>
         </a:solidFill>
+        <a:effectLst/>
       </p:bgPr>
     </p:bg>
     <p:spTree>
@@ -5797,7 +5841,7 @@
           <a:bodyPr wrap="square" lIns="0" tIns="0" rIns="0" bIns="0" rtlCol="0" anchor="ctr"/>
           <a:lstStyle/>
           <a:p>
-            <a:pPr indent="0" marL="0">
+            <a:pPr marL="0" indent="0">
               <a:buNone/>
             </a:pPr>
             <a:r>
@@ -5814,7 +5858,7 @@
             <a:endParaRPr lang="en-US" sz="3200" dirty="0"/>
           </a:p>
           <a:p>
-            <a:pPr indent="0" marL="0">
+            <a:pPr marL="0" indent="0">
               <a:buNone/>
             </a:pPr>
             <a:r>
@@ -5878,7 +5922,7 @@
           <a:bodyPr wrap="square" lIns="0" tIns="0" rIns="0" bIns="0" rtlCol="0" anchor="ctr"/>
           <a:lstStyle/>
           <a:p>
-            <a:pPr indent="0" marL="0">
+            <a:pPr marL="0" indent="0">
               <a:buNone/>
             </a:pPr>
             <a:r>
@@ -5942,7 +5986,7 @@
           <a:bodyPr wrap="square" lIns="0" tIns="0" rIns="0" bIns="0" rtlCol="0" anchor="ctr"/>
           <a:lstStyle/>
           <a:p>
-            <a:pPr algn="ctr" indent="0" marL="0">
+            <a:pPr marL="0" indent="0" algn="ctr">
               <a:buNone/>
             </a:pPr>
             <a:r>
@@ -5981,7 +6025,7 @@
           <a:bodyPr wrap="square" lIns="0" tIns="0" rIns="0" bIns="0" rtlCol="0" anchor="ctr"/>
           <a:lstStyle/>
           <a:p>
-            <a:pPr indent="0" marL="0">
+            <a:pPr marL="0" indent="0">
               <a:buNone/>
             </a:pPr>
             <a:r>
@@ -6045,7 +6089,7 @@
           <a:bodyPr wrap="square" lIns="0" tIns="0" rIns="0" bIns="0" rtlCol="0" anchor="ctr"/>
           <a:lstStyle/>
           <a:p>
-            <a:pPr algn="ctr" indent="0" marL="0">
+            <a:pPr marL="0" indent="0" algn="ctr">
               <a:buNone/>
             </a:pPr>
             <a:r>
@@ -6084,7 +6128,7 @@
           <a:bodyPr wrap="square" lIns="0" tIns="0" rIns="0" bIns="0" rtlCol="0" anchor="ctr"/>
           <a:lstStyle/>
           <a:p>
-            <a:pPr indent="0" marL="0">
+            <a:pPr marL="0" indent="0">
               <a:buNone/>
             </a:pPr>
             <a:r>
@@ -6148,7 +6192,7 @@
           <a:bodyPr wrap="square" lIns="0" tIns="0" rIns="0" bIns="0" rtlCol="0" anchor="ctr"/>
           <a:lstStyle/>
           <a:p>
-            <a:pPr algn="ctr" indent="0" marL="0">
+            <a:pPr marL="0" indent="0" algn="ctr">
               <a:buNone/>
             </a:pPr>
             <a:r>
@@ -6187,7 +6231,7 @@
           <a:bodyPr wrap="square" lIns="0" tIns="0" rIns="0" bIns="0" rtlCol="0" anchor="ctr"/>
           <a:lstStyle/>
           <a:p>
-            <a:pPr indent="0" marL="0">
+            <a:pPr marL="0" indent="0">
               <a:buNone/>
             </a:pPr>
             <a:r>
@@ -6251,7 +6295,7 @@
           <a:bodyPr wrap="square" lIns="0" tIns="0" rIns="0" bIns="0" rtlCol="0" anchor="ctr"/>
           <a:lstStyle/>
           <a:p>
-            <a:pPr algn="ctr" indent="0" marL="0">
+            <a:pPr marL="0" indent="0" algn="ctr">
               <a:buNone/>
             </a:pPr>
             <a:r>
@@ -6290,7 +6334,7 @@
           <a:bodyPr wrap="square" lIns="0" tIns="0" rIns="0" bIns="0" rtlCol="0" anchor="ctr"/>
           <a:lstStyle/>
           <a:p>
-            <a:pPr indent="0" marL="0">
+            <a:pPr marL="0" indent="0">
               <a:buNone/>
             </a:pPr>
             <a:r>
@@ -6354,7 +6398,7 @@
           <a:bodyPr wrap="square" lIns="0" tIns="0" rIns="0" bIns="0" rtlCol="0" anchor="ctr"/>
           <a:lstStyle/>
           <a:p>
-            <a:pPr indent="0" marL="0">
+            <a:pPr marL="0" indent="0">
               <a:buNone/>
             </a:pPr>
             <a:r>
@@ -6418,7 +6462,7 @@
           <a:bodyPr wrap="square" lIns="0" tIns="0" rIns="0" bIns="0" rtlCol="0" anchor="ctr"/>
           <a:lstStyle/>
           <a:p>
-            <a:pPr algn="ctr" indent="0" marL="0">
+            <a:pPr marL="0" indent="0" algn="ctr">
               <a:buNone/>
             </a:pPr>
             <a:r>
@@ -6435,7 +6479,7 @@
             <a:endParaRPr lang="en-US" sz="1000" dirty="0"/>
           </a:p>
           <a:p>
-            <a:pPr algn="ctr" indent="0" marL="0">
+            <a:pPr marL="0" indent="0" algn="ctr">
               <a:buNone/>
             </a:pPr>
             <a:r>
@@ -6499,7 +6543,7 @@
           <a:bodyPr wrap="square" lIns="0" tIns="0" rIns="0" bIns="0" rtlCol="0" anchor="ctr"/>
           <a:lstStyle/>
           <a:p>
-            <a:pPr algn="ctr" indent="0" marL="0">
+            <a:pPr marL="0" indent="0" algn="ctr">
               <a:buNone/>
             </a:pPr>
             <a:r>
@@ -6516,7 +6560,7 @@
             <a:endParaRPr lang="en-US" sz="1000" dirty="0"/>
           </a:p>
           <a:p>
-            <a:pPr algn="ctr" indent="0" marL="0">
+            <a:pPr marL="0" indent="0" algn="ctr">
               <a:buNone/>
             </a:pPr>
             <a:r>
@@ -6578,7 +6622,7 @@
           <a:bodyPr wrap="square" lIns="0" tIns="0" rIns="0" bIns="0" rtlCol="0" anchor="ctr"/>
           <a:lstStyle/>
           <a:p>
-            <a:pPr indent="0" marL="0">
+            <a:pPr marL="0" indent="0">
               <a:buNone/>
             </a:pPr>
             <a:r>
@@ -6605,7 +6649,7 @@
         <p:spPr>
           <a:xfrm>
             <a:off x="5687568" y="1325880"/>
-            <a:ext cx="1371600" cy="-274320"/>
+            <a:ext cx="1371600" cy="0"/>
           </a:xfrm>
           <a:prstGeom prst="line">
             <a:avLst/>
@@ -6688,7 +6732,7 @@
           <a:bodyPr wrap="square" lIns="0" tIns="0" rIns="0" bIns="0" rtlCol="0" anchor="ctr"/>
           <a:lstStyle/>
           <a:p>
-            <a:pPr indent="0" marL="0">
+            <a:pPr marL="0" indent="0">
               <a:buNone/>
             </a:pPr>
             <a:r>
@@ -6768,6 +6812,7 @@
         <a:solidFill>
           <a:srgbClr val="0D1B2A"/>
         </a:solidFill>
+        <a:effectLst/>
       </p:bgPr>
     </p:bg>
     <p:spTree>
@@ -6805,7 +6850,7 @@
           <a:bodyPr wrap="square" lIns="0" tIns="0" rIns="0" bIns="0" rtlCol="0" anchor="ctr"/>
           <a:lstStyle/>
           <a:p>
-            <a:pPr indent="0" marL="0">
+            <a:pPr marL="0" indent="0">
               <a:buNone/>
             </a:pPr>
             <a:r>
@@ -6919,7 +6964,7 @@
           <a:bodyPr wrap="square" lIns="0" tIns="0" rIns="0" bIns="0" rtlCol="0" anchor="ctr"/>
           <a:lstStyle/>
           <a:p>
-            <a:pPr algn="ctr" indent="0" marL="0">
+            <a:pPr marL="0" indent="0" algn="ctr">
               <a:buNone/>
             </a:pPr>
             <a:r>
@@ -6958,7 +7003,7 @@
           <a:bodyPr wrap="square" lIns="0" tIns="0" rIns="0" bIns="0" rtlCol="0" anchor="ctr"/>
           <a:lstStyle/>
           <a:p>
-            <a:pPr indent="0" marL="0">
+            <a:pPr marL="0" indent="0">
               <a:buNone/>
             </a:pPr>
             <a:r>
@@ -6997,7 +7042,7 @@
           <a:bodyPr wrap="square" lIns="0" tIns="0" rIns="0" bIns="0" rtlCol="0" anchor="ctr"/>
           <a:lstStyle/>
           <a:p>
-            <a:pPr indent="0" marL="0">
+            <a:pPr marL="0" indent="0">
               <a:buNone/>
             </a:pPr>
             <a:r>
@@ -7086,7 +7131,7 @@
           <a:bodyPr wrap="square" lIns="0" tIns="0" rIns="0" bIns="0" rtlCol="0" anchor="ctr"/>
           <a:lstStyle/>
           <a:p>
-            <a:pPr algn="ctr" indent="0" marL="0">
+            <a:pPr marL="0" indent="0" algn="ctr">
               <a:buNone/>
             </a:pPr>
             <a:r>
@@ -7125,7 +7170,7 @@
           <a:bodyPr wrap="square" lIns="0" tIns="0" rIns="0" bIns="0" rtlCol="0" anchor="ctr"/>
           <a:lstStyle/>
           <a:p>
-            <a:pPr indent="0" marL="0">
+            <a:pPr marL="0" indent="0">
               <a:buNone/>
             </a:pPr>
             <a:r>
@@ -7164,7 +7209,7 @@
           <a:bodyPr wrap="square" lIns="0" tIns="0" rIns="0" bIns="0" rtlCol="0" anchor="ctr"/>
           <a:lstStyle/>
           <a:p>
-            <a:pPr indent="0" marL="0">
+            <a:pPr marL="0" indent="0">
               <a:buNone/>
             </a:pPr>
             <a:r>
@@ -7253,7 +7298,7 @@
           <a:bodyPr wrap="square" lIns="0" tIns="0" rIns="0" bIns="0" rtlCol="0" anchor="ctr"/>
           <a:lstStyle/>
           <a:p>
-            <a:pPr algn="ctr" indent="0" marL="0">
+            <a:pPr marL="0" indent="0" algn="ctr">
               <a:buNone/>
             </a:pPr>
             <a:r>
@@ -7292,7 +7337,7 @@
           <a:bodyPr wrap="square" lIns="0" tIns="0" rIns="0" bIns="0" rtlCol="0" anchor="ctr"/>
           <a:lstStyle/>
           <a:p>
-            <a:pPr indent="0" marL="0">
+            <a:pPr marL="0" indent="0">
               <a:buNone/>
             </a:pPr>
             <a:r>
@@ -7331,7 +7376,7 @@
           <a:bodyPr wrap="square" lIns="0" tIns="0" rIns="0" bIns="0" rtlCol="0" anchor="ctr"/>
           <a:lstStyle/>
           <a:p>
-            <a:pPr indent="0" marL="0">
+            <a:pPr marL="0" indent="0">
               <a:buNone/>
             </a:pPr>
             <a:r>
@@ -7420,7 +7465,7 @@
           <a:bodyPr wrap="square" lIns="0" tIns="0" rIns="0" bIns="0" rtlCol="0" anchor="ctr"/>
           <a:lstStyle/>
           <a:p>
-            <a:pPr algn="ctr" indent="0" marL="0">
+            <a:pPr marL="0" indent="0" algn="ctr">
               <a:buNone/>
             </a:pPr>
             <a:r>
@@ -7459,7 +7504,7 @@
           <a:bodyPr wrap="square" lIns="0" tIns="0" rIns="0" bIns="0" rtlCol="0" anchor="ctr"/>
           <a:lstStyle/>
           <a:p>
-            <a:pPr indent="0" marL="0">
+            <a:pPr marL="0" indent="0">
               <a:buNone/>
             </a:pPr>
             <a:r>
@@ -7498,7 +7543,7 @@
           <a:bodyPr wrap="square" lIns="0" tIns="0" rIns="0" bIns="0" rtlCol="0" anchor="ctr"/>
           <a:lstStyle/>
           <a:p>
-            <a:pPr indent="0" marL="0">
+            <a:pPr marL="0" indent="0">
               <a:buNone/>
             </a:pPr>
             <a:r>
@@ -7587,7 +7632,7 @@
           <a:bodyPr wrap="square" lIns="0" tIns="0" rIns="0" bIns="0" rtlCol="0" anchor="ctr"/>
           <a:lstStyle/>
           <a:p>
-            <a:pPr algn="ctr" indent="0" marL="0">
+            <a:pPr marL="0" indent="0" algn="ctr">
               <a:buNone/>
             </a:pPr>
             <a:r>
@@ -7626,7 +7671,7 @@
           <a:bodyPr wrap="square" lIns="0" tIns="0" rIns="0" bIns="0" rtlCol="0" anchor="ctr"/>
           <a:lstStyle/>
           <a:p>
-            <a:pPr indent="0" marL="0">
+            <a:pPr marL="0" indent="0">
               <a:buNone/>
             </a:pPr>
             <a:r>
@@ -7665,7 +7710,7 @@
           <a:bodyPr wrap="square" lIns="0" tIns="0" rIns="0" bIns="0" rtlCol="0" anchor="ctr"/>
           <a:lstStyle/>
           <a:p>
-            <a:pPr indent="0" marL="0">
+            <a:pPr marL="0" indent="0">
               <a:buNone/>
             </a:pPr>
             <a:r>
@@ -7729,7 +7774,7 @@
           <a:bodyPr wrap="square" lIns="0" tIns="0" rIns="0" bIns="0" rtlCol="0" anchor="ctr"/>
           <a:lstStyle/>
           <a:p>
-            <a:pPr algn="ctr" indent="0" marL="0">
+            <a:pPr marL="0" indent="0" algn="ctr">
               <a:buNone/>
             </a:pPr>
             <a:r>
@@ -7763,6 +7808,7 @@
         <a:solidFill>
           <a:srgbClr val="F7FAFB"/>
         </a:solidFill>
+        <a:effectLst/>
       </p:bgPr>
     </p:bg>
     <p:spTree>
@@ -7800,7 +7846,7 @@
           <a:bodyPr wrap="square" lIns="0" tIns="0" rIns="0" bIns="0" rtlCol="0" anchor="ctr"/>
           <a:lstStyle/>
           <a:p>
-            <a:pPr indent="0" marL="0">
+            <a:pPr marL="0" indent="0">
               <a:buNone/>
             </a:pPr>
             <a:r>
@@ -7889,7 +7935,7 @@
           <a:bodyPr wrap="square" lIns="0" tIns="0" rIns="0" bIns="0" rtlCol="0" anchor="ctr"/>
           <a:lstStyle/>
           <a:p>
-            <a:pPr indent="0" marL="0">
+            <a:pPr marL="0" indent="0">
               <a:buNone/>
             </a:pPr>
             <a:r>
@@ -7928,7 +7974,7 @@
           <a:bodyPr wrap="square" lIns="0" tIns="0" rIns="0" bIns="0" rtlCol="0" anchor="ctr"/>
           <a:lstStyle/>
           <a:p>
-            <a:pPr indent="0" marL="0">
+            <a:pPr marL="0" indent="0">
               <a:buNone/>
             </a:pPr>
             <a:r>
@@ -7967,7 +8013,7 @@
           <a:bodyPr wrap="square" lIns="0" tIns="0" rIns="0" bIns="0" rtlCol="0" anchor="ctr"/>
           <a:lstStyle/>
           <a:p>
-            <a:pPr indent="0" marL="0">
+            <a:pPr marL="0" indent="0">
               <a:buNone/>
             </a:pPr>
             <a:r>
@@ -8006,7 +8052,7 @@
           <a:bodyPr wrap="square" lIns="0" tIns="0" rIns="0" bIns="0" rtlCol="0" anchor="ctr"/>
           <a:lstStyle/>
           <a:p>
-            <a:pPr indent="0" marL="0">
+            <a:pPr marL="0" indent="0">
               <a:buNone/>
             </a:pPr>
             <a:r>
@@ -8045,7 +8091,7 @@
           <a:bodyPr wrap="square" lIns="0" tIns="0" rIns="0" bIns="0" rtlCol="0" anchor="ctr"/>
           <a:lstStyle/>
           <a:p>
-            <a:pPr indent="0" marL="0">
+            <a:pPr marL="0" indent="0">
               <a:buNone/>
             </a:pPr>
             <a:r>
@@ -8084,7 +8130,7 @@
           <a:bodyPr wrap="square" lIns="0" tIns="0" rIns="0" bIns="0" rtlCol="0" anchor="ctr"/>
           <a:lstStyle/>
           <a:p>
-            <a:pPr indent="0" marL="0">
+            <a:pPr marL="0" indent="0">
               <a:buNone/>
             </a:pPr>
             <a:r>
@@ -8148,7 +8194,7 @@
           <a:bodyPr wrap="square" lIns="0" tIns="0" rIns="0" bIns="0" rtlCol="0" anchor="ctr"/>
           <a:lstStyle/>
           <a:p>
-            <a:pPr indent="0" marL="0">
+            <a:pPr marL="0" indent="0">
               <a:buNone/>
             </a:pPr>
             <a:r>
@@ -8187,7 +8233,7 @@
           <a:bodyPr wrap="square" lIns="0" tIns="0" rIns="0" bIns="0" rtlCol="0" anchor="ctr"/>
           <a:lstStyle/>
           <a:p>
-            <a:pPr indent="0" marL="0">
+            <a:pPr marL="0" indent="0">
               <a:buNone/>
             </a:pPr>
             <a:r>
@@ -8226,7 +8272,7 @@
           <a:bodyPr wrap="square" lIns="0" tIns="0" rIns="0" bIns="0" rtlCol="0" anchor="ctr"/>
           <a:lstStyle/>
           <a:p>
-            <a:pPr indent="0" marL="0">
+            <a:pPr marL="0" indent="0">
               <a:buNone/>
             </a:pPr>
             <a:r>
@@ -8265,7 +8311,7 @@
           <a:bodyPr wrap="square" lIns="0" tIns="0" rIns="0" bIns="0" rtlCol="0" anchor="ctr"/>
           <a:lstStyle/>
           <a:p>
-            <a:pPr indent="0" marL="0">
+            <a:pPr marL="0" indent="0">
               <a:buNone/>
             </a:pPr>
             <a:r>
@@ -8304,7 +8350,7 @@
           <a:bodyPr wrap="square" lIns="0" tIns="0" rIns="0" bIns="0" rtlCol="0" anchor="ctr"/>
           <a:lstStyle/>
           <a:p>
-            <a:pPr indent="0" marL="0">
+            <a:pPr marL="0" indent="0">
               <a:buNone/>
             </a:pPr>
             <a:r>
@@ -8343,7 +8389,7 @@
           <a:bodyPr wrap="square" lIns="0" tIns="0" rIns="0" bIns="0" rtlCol="0" anchor="ctr"/>
           <a:lstStyle/>
           <a:p>
-            <a:pPr indent="0" marL="0">
+            <a:pPr marL="0" indent="0">
               <a:buNone/>
             </a:pPr>
             <a:r>
@@ -8382,7 +8428,7 @@
           <a:bodyPr wrap="square" lIns="0" tIns="0" rIns="0" bIns="0" rtlCol="0" anchor="ctr"/>
           <a:lstStyle/>
           <a:p>
-            <a:pPr indent="0" marL="0">
+            <a:pPr marL="0" indent="0">
               <a:buNone/>
             </a:pPr>
             <a:r>
@@ -8471,7 +8517,7 @@
           <a:bodyPr wrap="square" lIns="0" tIns="0" rIns="0" bIns="0" rtlCol="0" anchor="ctr"/>
           <a:lstStyle/>
           <a:p>
-            <a:pPr indent="0" marL="0">
+            <a:pPr marL="0" indent="0">
               <a:buNone/>
             </a:pPr>
             <a:r>
@@ -8510,7 +8556,7 @@
           <a:bodyPr wrap="square" lIns="0" tIns="0" rIns="0" bIns="0" rtlCol="0" anchor="ctr"/>
           <a:lstStyle/>
           <a:p>
-            <a:pPr indent="0" marL="0">
+            <a:pPr marL="0" indent="0">
               <a:buNone/>
             </a:pPr>
             <a:r>
@@ -8599,7 +8645,7 @@
           <a:bodyPr wrap="square" lIns="0" tIns="0" rIns="0" bIns="0" rtlCol="0" anchor="ctr"/>
           <a:lstStyle/>
           <a:p>
-            <a:pPr indent="0" marL="0">
+            <a:pPr marL="0" indent="0">
               <a:buNone/>
             </a:pPr>
             <a:r>
@@ -8638,7 +8684,7 @@
           <a:bodyPr wrap="square" lIns="0" tIns="0" rIns="0" bIns="0" rtlCol="0" anchor="ctr"/>
           <a:lstStyle/>
           <a:p>
-            <a:pPr indent="0" marL="0">
+            <a:pPr marL="0" indent="0">
               <a:buNone/>
             </a:pPr>
             <a:r>
@@ -8727,7 +8773,7 @@
           <a:bodyPr wrap="square" lIns="0" tIns="0" rIns="0" bIns="0" rtlCol="0" anchor="ctr"/>
           <a:lstStyle/>
           <a:p>
-            <a:pPr indent="0" marL="0">
+            <a:pPr marL="0" indent="0">
               <a:buNone/>
             </a:pPr>
             <a:r>
@@ -8766,7 +8812,7 @@
           <a:bodyPr wrap="square" lIns="0" tIns="0" rIns="0" bIns="0" rtlCol="0" anchor="ctr"/>
           <a:lstStyle/>
           <a:p>
-            <a:pPr indent="0" marL="0">
+            <a:pPr marL="0" indent="0">
               <a:buNone/>
             </a:pPr>
             <a:r>
@@ -8855,7 +8901,7 @@
           <a:bodyPr wrap="square" lIns="0" tIns="0" rIns="0" bIns="0" rtlCol="0" anchor="ctr"/>
           <a:lstStyle/>
           <a:p>
-            <a:pPr indent="0" marL="0">
+            <a:pPr marL="0" indent="0">
               <a:buNone/>
             </a:pPr>
             <a:r>
@@ -8894,7 +8940,7 @@
           <a:bodyPr wrap="square" lIns="0" tIns="0" rIns="0" bIns="0" rtlCol="0" anchor="ctr"/>
           <a:lstStyle/>
           <a:p>
-            <a:pPr indent="0" marL="0">
+            <a:pPr marL="0" indent="0">
               <a:buNone/>
             </a:pPr>
             <a:r>
@@ -8928,6 +8974,7 @@
         <a:solidFill>
           <a:srgbClr val="0D1B2A"/>
         </a:solidFill>
+        <a:effectLst/>
       </p:bgPr>
     </p:bg>
     <p:spTree>
@@ -8965,7 +9012,7 @@
           <a:bodyPr wrap="square" lIns="0" tIns="0" rIns="0" bIns="0" rtlCol="0" anchor="ctr"/>
           <a:lstStyle/>
           <a:p>
-            <a:pPr indent="0" marL="0">
+            <a:pPr marL="0" indent="0">
               <a:buNone/>
             </a:pPr>
             <a:r>
@@ -9079,7 +9126,7 @@
           <a:bodyPr wrap="square" lIns="0" tIns="0" rIns="0" bIns="0" rtlCol="0" anchor="ctr"/>
           <a:lstStyle/>
           <a:p>
-            <a:pPr algn="ctr" indent="0" marL="0">
+            <a:pPr marL="0" indent="0" algn="ctr">
               <a:buNone/>
             </a:pPr>
             <a:r>
@@ -9096,7 +9143,7 @@
             <a:endParaRPr lang="en-US" sz="1300" dirty="0"/>
           </a:p>
           <a:p>
-            <a:pPr algn="ctr" indent="0" marL="0">
+            <a:pPr marL="0" indent="0" algn="ctr">
               <a:buNone/>
             </a:pPr>
             <a:r>
@@ -9160,7 +9207,7 @@
           <a:bodyPr wrap="square" lIns="0" tIns="0" rIns="0" bIns="0" rtlCol="0" anchor="ctr"/>
           <a:lstStyle/>
           <a:p>
-            <a:pPr algn="ctr" indent="0" marL="0">
+            <a:pPr marL="0" indent="0" algn="ctr">
               <a:buNone/>
             </a:pPr>
             <a:r>
@@ -9199,7 +9246,7 @@
           <a:bodyPr wrap="square" lIns="0" tIns="0" rIns="0" bIns="0" rtlCol="0" anchor="ctr"/>
           <a:lstStyle/>
           <a:p>
-            <a:pPr algn="ctr" indent="0" marL="0">
+            <a:pPr marL="0" indent="0" algn="ctr">
               <a:buNone/>
             </a:pPr>
             <a:r>
@@ -9263,7 +9310,7 @@
           <a:bodyPr wrap="square" lIns="0" tIns="0" rIns="0" bIns="0" rtlCol="0" anchor="ctr"/>
           <a:lstStyle/>
           <a:p>
-            <a:pPr algn="ctr" indent="0" marL="0">
+            <a:pPr marL="0" indent="0" algn="ctr">
               <a:buNone/>
             </a:pPr>
             <a:r>
@@ -9302,7 +9349,7 @@
           <a:bodyPr wrap="square" lIns="0" tIns="0" rIns="0" bIns="0" rtlCol="0" anchor="ctr"/>
           <a:lstStyle/>
           <a:p>
-            <a:pPr algn="ctr" indent="0" marL="0">
+            <a:pPr marL="0" indent="0" algn="ctr">
               <a:buNone/>
             </a:pPr>
             <a:r>
@@ -9366,7 +9413,7 @@
           <a:bodyPr wrap="square" lIns="0" tIns="0" rIns="0" bIns="0" rtlCol="0" anchor="ctr"/>
           <a:lstStyle/>
           <a:p>
-            <a:pPr algn="ctr" indent="0" marL="0">
+            <a:pPr marL="0" indent="0" algn="ctr">
               <a:buNone/>
             </a:pPr>
             <a:r>
@@ -9405,7 +9452,7 @@
           <a:bodyPr wrap="square" lIns="0" tIns="0" rIns="0" bIns="0" rtlCol="0" anchor="ctr"/>
           <a:lstStyle/>
           <a:p>
-            <a:pPr algn="ctr" indent="0" marL="0">
+            <a:pPr marL="0" indent="0" algn="ctr">
               <a:buNone/>
             </a:pPr>
             <a:r>
@@ -9469,7 +9516,7 @@
           <a:bodyPr wrap="square" lIns="0" tIns="0" rIns="0" bIns="0" rtlCol="0" anchor="ctr"/>
           <a:lstStyle/>
           <a:p>
-            <a:pPr indent="0" marL="0">
+            <a:pPr marL="0" indent="0">
               <a:buNone/>
             </a:pPr>
             <a:r>
@@ -9519,7 +9566,7 @@
         <p:spPr>
           <a:xfrm>
             <a:off x="923544" y="4343400"/>
-            <a:ext cx="329184" cy="-205740"/>
+            <a:ext cx="329184" cy="0"/>
           </a:xfrm>
           <a:prstGeom prst="line">
             <a:avLst/>
@@ -9565,7 +9612,7 @@
         <p:spPr>
           <a:xfrm>
             <a:off x="1581912" y="4370832"/>
-            <a:ext cx="329184" cy="-274320"/>
+            <a:ext cx="329184" cy="0"/>
           </a:xfrm>
           <a:prstGeom prst="line">
             <a:avLst/>
@@ -9611,7 +9658,7 @@
         <p:spPr>
           <a:xfrm>
             <a:off x="2240280" y="4274820"/>
-            <a:ext cx="329184" cy="-109728"/>
+            <a:ext cx="329184" cy="0"/>
           </a:xfrm>
           <a:prstGeom prst="line">
             <a:avLst/>
@@ -9657,7 +9704,7 @@
         <p:spPr>
           <a:xfrm>
             <a:off x="2898648" y="4315968"/>
-            <a:ext cx="329184" cy="-246888"/>
+            <a:ext cx="329184" cy="0"/>
           </a:xfrm>
           <a:prstGeom prst="line">
             <a:avLst/>
@@ -9703,7 +9750,7 @@
         <p:spPr>
           <a:xfrm>
             <a:off x="3557016" y="4302252"/>
-            <a:ext cx="329184" cy="-150876"/>
+            <a:ext cx="329184" cy="0"/>
           </a:xfrm>
           <a:prstGeom prst="line">
             <a:avLst/>
@@ -9749,7 +9796,7 @@
         <p:spPr>
           <a:xfrm>
             <a:off x="4215384" y="4288536"/>
-            <a:ext cx="329184" cy="-178308"/>
+            <a:ext cx="329184" cy="0"/>
           </a:xfrm>
           <a:prstGeom prst="line">
             <a:avLst/>
@@ -9807,7 +9854,7 @@
           <a:bodyPr wrap="square" lIns="0" tIns="0" rIns="0" bIns="0" rtlCol="0" anchor="ctr"/>
           <a:lstStyle/>
           <a:p>
-            <a:pPr indent="0" marL="0">
+            <a:pPr marL="0" indent="0">
               <a:buNone/>
             </a:pPr>
             <a:r>
@@ -9871,7 +9918,7 @@
           <a:bodyPr wrap="square" lIns="0" tIns="0" rIns="0" bIns="0" rtlCol="0" anchor="ctr"/>
           <a:lstStyle/>
           <a:p>
-            <a:pPr indent="0" marL="0">
+            <a:pPr marL="0" indent="0">
               <a:buNone/>
             </a:pPr>
             <a:r>
@@ -9935,7 +9982,7 @@
           <a:bodyPr wrap="square" lIns="0" tIns="0" rIns="0" bIns="0" rtlCol="0" anchor="ctr"/>
           <a:lstStyle/>
           <a:p>
-            <a:pPr indent="0" marL="0">
+            <a:pPr marL="0" indent="0">
               <a:buNone/>
             </a:pPr>
             <a:r>
@@ -9999,7 +10046,7 @@
           <a:bodyPr wrap="square" lIns="0" tIns="0" rIns="0" bIns="0" rtlCol="0" anchor="ctr"/>
           <a:lstStyle/>
           <a:p>
-            <a:pPr indent="0" marL="0">
+            <a:pPr marL="0" indent="0">
               <a:buNone/>
             </a:pPr>
             <a:r>
@@ -10063,7 +10110,7 @@
           <a:bodyPr wrap="square" lIns="0" tIns="0" rIns="0" bIns="0" rtlCol="0" anchor="ctr"/>
           <a:lstStyle/>
           <a:p>
-            <a:pPr indent="0" marL="0">
+            <a:pPr marL="0" indent="0">
               <a:buNone/>
             </a:pPr>
             <a:r>
@@ -10127,7 +10174,7 @@
           <a:bodyPr wrap="square" lIns="0" tIns="0" rIns="0" bIns="0" rtlCol="0" anchor="ctr"/>
           <a:lstStyle/>
           <a:p>
-            <a:pPr indent="0" marL="0">
+            <a:pPr marL="0" indent="0">
               <a:buNone/>
             </a:pPr>
             <a:r>
@@ -10191,7 +10238,7 @@
           <a:bodyPr wrap="square" lIns="0" tIns="0" rIns="0" bIns="0" rtlCol="0" anchor="ctr"/>
           <a:lstStyle/>
           <a:p>
-            <a:pPr indent="0" marL="0">
+            <a:pPr marL="0" indent="0">
               <a:buNone/>
             </a:pPr>
             <a:r>
@@ -10255,7 +10302,7 @@
           <a:bodyPr wrap="square" lIns="0" tIns="0" rIns="0" bIns="0" rtlCol="0" anchor="ctr"/>
           <a:lstStyle/>
           <a:p>
-            <a:pPr indent="0" marL="0">
+            <a:pPr marL="0" indent="0">
               <a:buNone/>
             </a:pPr>
             <a:r>
@@ -10289,6 +10336,7 @@
         <a:solidFill>
           <a:srgbClr val="F7FAFB"/>
         </a:solidFill>
+        <a:effectLst/>
       </p:bgPr>
     </p:bg>
     <p:spTree>
@@ -10326,7 +10374,7 @@
           <a:bodyPr wrap="square" lIns="0" tIns="0" rIns="0" bIns="0" rtlCol="0" anchor="ctr"/>
           <a:lstStyle/>
           <a:p>
-            <a:pPr indent="0" marL="0">
+            <a:pPr marL="0" indent="0">
               <a:buNone/>
             </a:pPr>
             <a:r>
@@ -10415,7 +10463,7 @@
           <a:bodyPr wrap="square" lIns="0" tIns="0" rIns="0" bIns="0" rtlCol="0" anchor="ctr"/>
           <a:lstStyle/>
           <a:p>
-            <a:pPr indent="0" marL="0">
+            <a:pPr marL="0" indent="0">
               <a:buNone/>
             </a:pPr>
             <a:r>
@@ -10479,7 +10527,7 @@
           <a:bodyPr wrap="square" lIns="0" tIns="0" rIns="0" bIns="0" rtlCol="0" anchor="ctr"/>
           <a:lstStyle/>
           <a:p>
-            <a:pPr algn="ctr" indent="0" marL="0">
+            <a:pPr marL="0" indent="0" algn="ctr">
               <a:buNone/>
             </a:pPr>
             <a:r>
@@ -10518,7 +10566,7 @@
           <a:bodyPr wrap="square" lIns="0" tIns="0" rIns="0" bIns="0" rtlCol="0" anchor="ctr"/>
           <a:lstStyle/>
           <a:p>
-            <a:pPr indent="0" marL="0">
+            <a:pPr marL="0" indent="0">
               <a:buNone/>
             </a:pPr>
             <a:r>
@@ -10582,7 +10630,7 @@
           <a:bodyPr wrap="square" lIns="0" tIns="0" rIns="0" bIns="0" rtlCol="0" anchor="ctr"/>
           <a:lstStyle/>
           <a:p>
-            <a:pPr algn="ctr" indent="0" marL="0">
+            <a:pPr marL="0" indent="0" algn="ctr">
               <a:buNone/>
             </a:pPr>
             <a:r>
@@ -10621,7 +10669,7 @@
           <a:bodyPr wrap="square" lIns="0" tIns="0" rIns="0" bIns="0" rtlCol="0" anchor="ctr"/>
           <a:lstStyle/>
           <a:p>
-            <a:pPr indent="0" marL="0">
+            <a:pPr marL="0" indent="0">
               <a:buNone/>
             </a:pPr>
             <a:r>
@@ -10685,7 +10733,7 @@
           <a:bodyPr wrap="square" lIns="0" tIns="0" rIns="0" bIns="0" rtlCol="0" anchor="ctr"/>
           <a:lstStyle/>
           <a:p>
-            <a:pPr algn="ctr" indent="0" marL="0">
+            <a:pPr marL="0" indent="0" algn="ctr">
               <a:buNone/>
             </a:pPr>
             <a:r>
@@ -10724,7 +10772,7 @@
           <a:bodyPr wrap="square" lIns="0" tIns="0" rIns="0" bIns="0" rtlCol="0" anchor="ctr"/>
           <a:lstStyle/>
           <a:p>
-            <a:pPr indent="0" marL="0">
+            <a:pPr marL="0" indent="0">
               <a:buNone/>
             </a:pPr>
             <a:r>
@@ -10788,7 +10836,7 @@
           <a:bodyPr wrap="square" lIns="0" tIns="0" rIns="0" bIns="0" rtlCol="0" anchor="ctr"/>
           <a:lstStyle/>
           <a:p>
-            <a:pPr algn="ctr" indent="0" marL="0">
+            <a:pPr marL="0" indent="0" algn="ctr">
               <a:buNone/>
             </a:pPr>
             <a:r>
@@ -10827,7 +10875,7 @@
           <a:bodyPr wrap="square" lIns="0" tIns="0" rIns="0" bIns="0" rtlCol="0" anchor="ctr"/>
           <a:lstStyle/>
           <a:p>
-            <a:pPr indent="0" marL="0">
+            <a:pPr marL="0" indent="0">
               <a:buNone/>
             </a:pPr>
             <a:r>
@@ -10891,7 +10939,7 @@
           <a:bodyPr wrap="square" lIns="0" tIns="0" rIns="0" bIns="0" rtlCol="0" anchor="ctr"/>
           <a:lstStyle/>
           <a:p>
-            <a:pPr algn="ctr" indent="0" marL="0">
+            <a:pPr marL="0" indent="0" algn="ctr">
               <a:buNone/>
             </a:pPr>
             <a:r>
@@ -10930,7 +10978,7 @@
           <a:bodyPr wrap="square" lIns="0" tIns="0" rIns="0" bIns="0" rtlCol="0" anchor="ctr"/>
           <a:lstStyle/>
           <a:p>
-            <a:pPr indent="0" marL="0">
+            <a:pPr marL="0" indent="0">
               <a:buNone/>
             </a:pPr>
             <a:r>
@@ -10994,7 +11042,7 @@
           <a:bodyPr wrap="square" lIns="0" tIns="0" rIns="0" bIns="0" rtlCol="0" anchor="ctr"/>
           <a:lstStyle/>
           <a:p>
-            <a:pPr indent="0" marL="0">
+            <a:pPr marL="0" indent="0">
               <a:buNone/>
             </a:pPr>
             <a:r>
@@ -11058,7 +11106,7 @@
           <a:bodyPr wrap="square" lIns="0" tIns="0" rIns="0" bIns="0" rtlCol="0" anchor="ctr"/>
           <a:lstStyle/>
           <a:p>
-            <a:pPr algn="ctr" indent="0" marL="0">
+            <a:pPr marL="0" indent="0" algn="ctr">
               <a:buNone/>
             </a:pPr>
             <a:r>
@@ -11097,7 +11145,7 @@
           <a:bodyPr wrap="square" lIns="0" tIns="0" rIns="0" bIns="0" rtlCol="0" anchor="ctr"/>
           <a:lstStyle/>
           <a:p>
-            <a:pPr indent="0" marL="0">
+            <a:pPr marL="0" indent="0">
               <a:buNone/>
             </a:pPr>
             <a:r>
@@ -11161,7 +11209,7 @@
           <a:bodyPr wrap="square" lIns="0" tIns="0" rIns="0" bIns="0" rtlCol="0" anchor="ctr"/>
           <a:lstStyle/>
           <a:p>
-            <a:pPr algn="ctr" indent="0" marL="0">
+            <a:pPr marL="0" indent="0" algn="ctr">
               <a:buNone/>
             </a:pPr>
             <a:r>
@@ -11200,7 +11248,7 @@
           <a:bodyPr wrap="square" lIns="0" tIns="0" rIns="0" bIns="0" rtlCol="0" anchor="ctr"/>
           <a:lstStyle/>
           <a:p>
-            <a:pPr indent="0" marL="0">
+            <a:pPr marL="0" indent="0">
               <a:buNone/>
             </a:pPr>
             <a:r>
@@ -11264,7 +11312,7 @@
           <a:bodyPr wrap="square" lIns="0" tIns="0" rIns="0" bIns="0" rtlCol="0" anchor="ctr"/>
           <a:lstStyle/>
           <a:p>
-            <a:pPr algn="ctr" indent="0" marL="0">
+            <a:pPr marL="0" indent="0" algn="ctr">
               <a:buNone/>
             </a:pPr>
             <a:r>
@@ -11303,7 +11351,7 @@
           <a:bodyPr wrap="square" lIns="0" tIns="0" rIns="0" bIns="0" rtlCol="0" anchor="ctr"/>
           <a:lstStyle/>
           <a:p>
-            <a:pPr indent="0" marL="0">
+            <a:pPr marL="0" indent="0">
               <a:buNone/>
             </a:pPr>
             <a:r>
@@ -11367,7 +11415,7 @@
           <a:bodyPr wrap="square" lIns="0" tIns="0" rIns="0" bIns="0" rtlCol="0" anchor="ctr"/>
           <a:lstStyle/>
           <a:p>
-            <a:pPr algn="ctr" indent="0" marL="0">
+            <a:pPr marL="0" indent="0" algn="ctr">
               <a:buNone/>
             </a:pPr>
             <a:r>
@@ -11406,7 +11454,7 @@
           <a:bodyPr wrap="square" lIns="0" tIns="0" rIns="0" bIns="0" rtlCol="0" anchor="ctr"/>
           <a:lstStyle/>
           <a:p>
-            <a:pPr indent="0" marL="0">
+            <a:pPr marL="0" indent="0">
               <a:buNone/>
             </a:pPr>
             <a:r>
@@ -11470,7 +11518,7 @@
           <a:bodyPr wrap="square" lIns="0" tIns="0" rIns="0" bIns="0" rtlCol="0" anchor="ctr"/>
           <a:lstStyle/>
           <a:p>
-            <a:pPr algn="ctr" indent="0" marL="0">
+            <a:pPr marL="0" indent="0" algn="ctr">
               <a:buNone/>
             </a:pPr>
             <a:r>
@@ -11509,7 +11557,7 @@
           <a:bodyPr wrap="square" lIns="0" tIns="0" rIns="0" bIns="0" rtlCol="0" anchor="ctr"/>
           <a:lstStyle/>
           <a:p>
-            <a:pPr indent="0" marL="0">
+            <a:pPr marL="0" indent="0">
               <a:buNone/>
             </a:pPr>
             <a:r>
@@ -11573,7 +11621,7 @@
           <a:bodyPr wrap="square" lIns="0" tIns="0" rIns="0" bIns="0" rtlCol="0" anchor="ctr"/>
           <a:lstStyle/>
           <a:p>
-            <a:pPr indent="0" marL="0">
+            <a:pPr marL="0" indent="0">
               <a:buNone/>
             </a:pPr>
             <a:r>
@@ -11892,4 +11940,299 @@
     </a:ext>
   </a:extLst>
 </a:theme>
+</file>
+
+<file path=ppt/theme/theme2.xml><?xml version="1.0" encoding="utf-8"?>
+<a:theme xmlns:a="http://schemas.openxmlformats.org/drawingml/2006/main" name="Office Theme">
+  <a:themeElements>
+    <a:clrScheme name="Office">
+      <a:dk1>
+        <a:sysClr val="windowText" lastClr="000000"/>
+      </a:dk1>
+      <a:lt1>
+        <a:sysClr val="window" lastClr="FFFFFF"/>
+      </a:lt1>
+      <a:dk2>
+        <a:srgbClr val="44546A"/>
+      </a:dk2>
+      <a:lt2>
+        <a:srgbClr val="E7E6E6"/>
+      </a:lt2>
+      <a:accent1>
+        <a:srgbClr val="4472C4"/>
+      </a:accent1>
+      <a:accent2>
+        <a:srgbClr val="ED7D31"/>
+      </a:accent2>
+      <a:accent3>
+        <a:srgbClr val="A5A5A5"/>
+      </a:accent3>
+      <a:accent4>
+        <a:srgbClr val="FFC000"/>
+      </a:accent4>
+      <a:accent5>
+        <a:srgbClr val="5B9BD5"/>
+      </a:accent5>
+      <a:accent6>
+        <a:srgbClr val="70AD47"/>
+      </a:accent6>
+      <a:hlink>
+        <a:srgbClr val="0563C1"/>
+      </a:hlink>
+      <a:folHlink>
+        <a:srgbClr val="954F72"/>
+      </a:folHlink>
+    </a:clrScheme>
+    <a:fontScheme name="Office">
+      <a:majorFont>
+        <a:latin typeface="Calibri Light" panose="020F0302020204030204"/>
+        <a:ea typeface=""/>
+        <a:cs typeface=""/>
+        <a:font script="Jpan" typeface="游ゴシック Light"/>
+        <a:font script="Hang" typeface="맑은 고딕"/>
+        <a:font script="Hans" typeface="等线 Light"/>
+        <a:font script="Hant" typeface="新細明體"/>
+        <a:font script="Arab" typeface="Times New Roman"/>
+        <a:font script="Hebr" typeface="Times New Roman"/>
+        <a:font script="Thai" typeface="Angsana New"/>
+        <a:font script="Ethi" typeface="Nyala"/>
+        <a:font script="Beng" typeface="Vrinda"/>
+        <a:font script="Gujr" typeface="Shruti"/>
+        <a:font script="Khmr" typeface="MoolBoran"/>
+        <a:font script="Knda" typeface="Tunga"/>
+        <a:font script="Guru" typeface="Raavi"/>
+        <a:font script="Cans" typeface="Euphemia"/>
+        <a:font script="Cher" typeface="Plantagenet Cherokee"/>
+        <a:font script="Yiii" typeface="Microsoft Yi Baiti"/>
+        <a:font script="Tibt" typeface="Microsoft Himalaya"/>
+        <a:font script="Thaa" typeface="MV Boli"/>
+        <a:font script="Deva" typeface="Mangal"/>
+        <a:font script="Telu" typeface="Gautami"/>
+        <a:font script="Taml" typeface="Latha"/>
+        <a:font script="Syrc" typeface="Estrangelo Edessa"/>
+        <a:font script="Orya" typeface="Kalinga"/>
+        <a:font script="Mlym" typeface="Kartika"/>
+        <a:font script="Laoo" typeface="DokChampa"/>
+        <a:font script="Sinh" typeface="Iskoola Pota"/>
+        <a:font script="Mong" typeface="Mongolian Baiti"/>
+        <a:font script="Viet" typeface="Times New Roman"/>
+        <a:font script="Uigh" typeface="Microsoft Uighur"/>
+        <a:font script="Geor" typeface="Sylfaen"/>
+        <a:font script="Armn" typeface="Arial"/>
+        <a:font script="Bugi" typeface="Leelawadee UI"/>
+        <a:font script="Bopo" typeface="Microsoft JhengHei"/>
+        <a:font script="Java" typeface="Javanese Text"/>
+        <a:font script="Lisu" typeface="Segoe UI"/>
+        <a:font script="Mymr" typeface="Myanmar Text"/>
+        <a:font script="Nkoo" typeface="Ebrima"/>
+        <a:font script="Olck" typeface="Nirmala UI"/>
+        <a:font script="Osma" typeface="Ebrima"/>
+        <a:font script="Phag" typeface="Phagspa"/>
+        <a:font script="Syrn" typeface="Estrangelo Edessa"/>
+        <a:font script="Syrj" typeface="Estrangelo Edessa"/>
+        <a:font script="Syre" typeface="Estrangelo Edessa"/>
+        <a:font script="Sora" typeface="Nirmala UI"/>
+        <a:font script="Tale" typeface="Microsoft Tai Le"/>
+        <a:font script="Talu" typeface="Microsoft New Tai Lue"/>
+        <a:font script="Tfng" typeface="Ebrima"/>
+      </a:majorFont>
+      <a:minorFont>
+        <a:latin typeface="Calibri" panose="020F0502020204030204"/>
+        <a:ea typeface=""/>
+        <a:cs typeface=""/>
+        <a:font script="Jpan" typeface="游ゴシック"/>
+        <a:font script="Hang" typeface="맑은 고딕"/>
+        <a:font script="Hans" typeface="等线"/>
+        <a:font script="Hant" typeface="新細明體"/>
+        <a:font script="Arab" typeface="Arial"/>
+        <a:font script="Hebr" typeface="Arial"/>
+        <a:font script="Thai" typeface="Cordia New"/>
+        <a:font script="Ethi" typeface="Nyala"/>
+        <a:font script="Beng" typeface="Vrinda"/>
+        <a:font script="Gujr" typeface="Shruti"/>
+        <a:font script="Khmr" typeface="DaunPenh"/>
+        <a:font script="Knda" typeface="Tunga"/>
+        <a:font script="Guru" typeface="Raavi"/>
+        <a:font script="Cans" typeface="Euphemia"/>
+        <a:font script="Cher" typeface="Plantagenet Cherokee"/>
+        <a:font script="Yiii" typeface="Microsoft Yi Baiti"/>
+        <a:font script="Tibt" typeface="Microsoft Himalaya"/>
+        <a:font script="Thaa" typeface="MV Boli"/>
+        <a:font script="Deva" typeface="Mangal"/>
+        <a:font script="Telu" typeface="Gautami"/>
+        <a:font script="Taml" typeface="Latha"/>
+        <a:font script="Syrc" typeface="Estrangelo Edessa"/>
+        <a:font script="Orya" typeface="Kalinga"/>
+        <a:font script="Mlym" typeface="Kartika"/>
+        <a:font script="Laoo" typeface="DokChampa"/>
+        <a:font script="Sinh" typeface="Iskoola Pota"/>
+        <a:font script="Mong" typeface="Mongolian Baiti"/>
+        <a:font script="Viet" typeface="Arial"/>
+        <a:font script="Uigh" typeface="Microsoft Uighur"/>
+        <a:font script="Geor" typeface="Sylfaen"/>
+        <a:font script="Armn" typeface="Arial"/>
+        <a:font script="Bugi" typeface="Leelawadee UI"/>
+        <a:font script="Bopo" typeface="Microsoft JhengHei"/>
+        <a:font script="Java" typeface="Javanese Text"/>
+        <a:font script="Lisu" typeface="Segoe UI"/>
+        <a:font script="Mymr" typeface="Myanmar Text"/>
+        <a:font script="Nkoo" typeface="Ebrima"/>
+        <a:font script="Olck" typeface="Nirmala UI"/>
+        <a:font script="Osma" typeface="Ebrima"/>
+        <a:font script="Phag" typeface="Phagspa"/>
+        <a:font script="Syrn" typeface="Estrangelo Edessa"/>
+        <a:font script="Syrj" typeface="Estrangelo Edessa"/>
+        <a:font script="Syre" typeface="Estrangelo Edessa"/>
+        <a:font script="Sora" typeface="Nirmala UI"/>
+        <a:font script="Tale" typeface="Microsoft Tai Le"/>
+        <a:font script="Talu" typeface="Microsoft New Tai Lue"/>
+        <a:font script="Tfng" typeface="Ebrima"/>
+      </a:minorFont>
+    </a:fontScheme>
+    <a:fmtScheme name="Office">
+      <a:fillStyleLst>
+        <a:solidFill>
+          <a:schemeClr val="phClr"/>
+        </a:solidFill>
+        <a:gradFill rotWithShape="1">
+          <a:gsLst>
+            <a:gs pos="0">
+              <a:schemeClr val="phClr">
+                <a:lumMod val="110000"/>
+                <a:satMod val="105000"/>
+                <a:tint val="67000"/>
+              </a:schemeClr>
+            </a:gs>
+            <a:gs pos="50000">
+              <a:schemeClr val="phClr">
+                <a:lumMod val="105000"/>
+                <a:satMod val="103000"/>
+                <a:tint val="73000"/>
+              </a:schemeClr>
+            </a:gs>
+            <a:gs pos="100000">
+              <a:schemeClr val="phClr">
+                <a:lumMod val="105000"/>
+                <a:satMod val="109000"/>
+                <a:tint val="81000"/>
+              </a:schemeClr>
+            </a:gs>
+          </a:gsLst>
+          <a:lin ang="5400000" scaled="0"/>
+        </a:gradFill>
+        <a:gradFill rotWithShape="1">
+          <a:gsLst>
+            <a:gs pos="0">
+              <a:schemeClr val="phClr">
+                <a:satMod val="103000"/>
+                <a:lumMod val="102000"/>
+                <a:tint val="94000"/>
+              </a:schemeClr>
+            </a:gs>
+            <a:gs pos="50000">
+              <a:schemeClr val="phClr">
+                <a:satMod val="110000"/>
+                <a:lumMod val="100000"/>
+                <a:shade val="100000"/>
+              </a:schemeClr>
+            </a:gs>
+            <a:gs pos="100000">
+              <a:schemeClr val="phClr">
+                <a:lumMod val="99000"/>
+                <a:satMod val="120000"/>
+                <a:shade val="78000"/>
+              </a:schemeClr>
+            </a:gs>
+          </a:gsLst>
+          <a:lin ang="5400000" scaled="0"/>
+        </a:gradFill>
+      </a:fillStyleLst>
+      <a:lnStyleLst>
+        <a:ln w="6350" cap="flat" cmpd="sng" algn="ctr">
+          <a:solidFill>
+            <a:schemeClr val="phClr"/>
+          </a:solidFill>
+          <a:prstDash val="solid"/>
+          <a:miter lim="800000"/>
+        </a:ln>
+        <a:ln w="12700" cap="flat" cmpd="sng" algn="ctr">
+          <a:solidFill>
+            <a:schemeClr val="phClr"/>
+          </a:solidFill>
+          <a:prstDash val="solid"/>
+          <a:miter lim="800000"/>
+        </a:ln>
+        <a:ln w="19050" cap="flat" cmpd="sng" algn="ctr">
+          <a:solidFill>
+            <a:schemeClr val="phClr"/>
+          </a:solidFill>
+          <a:prstDash val="solid"/>
+          <a:miter lim="800000"/>
+        </a:ln>
+      </a:lnStyleLst>
+      <a:effectStyleLst>
+        <a:effectStyle>
+          <a:effectLst/>
+        </a:effectStyle>
+        <a:effectStyle>
+          <a:effectLst/>
+        </a:effectStyle>
+        <a:effectStyle>
+          <a:effectLst>
+            <a:outerShdw blurRad="57150" dist="19050" dir="5400000" algn="ctr" rotWithShape="0">
+              <a:srgbClr val="000000">
+                <a:alpha val="63000"/>
+              </a:srgbClr>
+            </a:outerShdw>
+          </a:effectLst>
+        </a:effectStyle>
+      </a:effectStyleLst>
+      <a:bgFillStyleLst>
+        <a:solidFill>
+          <a:schemeClr val="phClr"/>
+        </a:solidFill>
+        <a:solidFill>
+          <a:schemeClr val="phClr">
+            <a:tint val="95000"/>
+            <a:satMod val="170000"/>
+          </a:schemeClr>
+        </a:solidFill>
+        <a:gradFill rotWithShape="1">
+          <a:gsLst>
+            <a:gs pos="0">
+              <a:schemeClr val="phClr">
+                <a:tint val="93000"/>
+                <a:satMod val="150000"/>
+                <a:shade val="98000"/>
+                <a:lumMod val="102000"/>
+              </a:schemeClr>
+            </a:gs>
+            <a:gs pos="50000">
+              <a:schemeClr val="phClr">
+                <a:tint val="98000"/>
+                <a:satMod val="130000"/>
+                <a:shade val="90000"/>
+                <a:lumMod val="103000"/>
+              </a:schemeClr>
+            </a:gs>
+            <a:gs pos="100000">
+              <a:schemeClr val="phClr">
+                <a:shade val="63000"/>
+                <a:satMod val="120000"/>
+              </a:schemeClr>
+            </a:gs>
+          </a:gsLst>
+          <a:lin ang="5400000" scaled="0"/>
+        </a:gradFill>
+      </a:bgFillStyleLst>
+    </a:fmtScheme>
+  </a:themeElements>
+  <a:objectDefaults/>
+  <a:extraClrSchemeLst/>
+  <a:extLst>
+    <a:ext uri="{05A4C25C-085E-4340-85A3-A5531E510DB2}">
+      <thm15:themeFamily xmlns:thm15="http://schemas.microsoft.com/office/thememl/2012/main" name="Office Theme" id="{62F939B6-93AF-4DB8-9C6B-D6C7DFDC589F}" vid="{4A3C46E8-61CC-4603-A589-7422A47A8E4A}"/>
+    </a:ext>
+  </a:extLst>
+</a:theme>
 </file>